--- a/Fake news detection presentation.pptx
+++ b/Fake news detection presentation.pptx
@@ -10,14 +10,16 @@
     <p:sldId id="258" r:id="rId4"/>
     <p:sldId id="269" r:id="rId5"/>
     <p:sldId id="270" r:id="rId6"/>
-    <p:sldId id="271" r:id="rId7"/>
+    <p:sldId id="273" r:id="rId7"/>
     <p:sldId id="259" r:id="rId8"/>
     <p:sldId id="260" r:id="rId9"/>
     <p:sldId id="261" r:id="rId10"/>
     <p:sldId id="262" r:id="rId11"/>
     <p:sldId id="264" r:id="rId12"/>
-    <p:sldId id="265" r:id="rId13"/>
-    <p:sldId id="267" r:id="rId14"/>
+    <p:sldId id="272" r:id="rId13"/>
+    <p:sldId id="265" r:id="rId14"/>
+    <p:sldId id="271" r:id="rId15"/>
+    <p:sldId id="267" r:id="rId16"/>
   </p:sldIdLst>
   <p:sldSz cx="9144000" cy="6858000" type="screen4x3"/>
   <p:notesSz cx="6858000" cy="9144000"/>
@@ -540,7 +542,7 @@
           <a:p>
             <a:fld id="{5BCAD085-E8A6-8845-BD4E-CB4CCA059FC4}" type="datetimeFigureOut">
               <a:rPr lang="en-US" smtClean="0"/>
-              <a:t>11/13/2025</a:t>
+              <a:t>11/15/2025</a:t>
             </a:fld>
             <a:endParaRPr lang="en-US"/>
           </a:p>
@@ -724,7 +726,7 @@
           <a:p>
             <a:fld id="{5BCAD085-E8A6-8845-BD4E-CB4CCA059FC4}" type="datetimeFigureOut">
               <a:rPr lang="en-US" smtClean="0"/>
-              <a:t>11/13/2025</a:t>
+              <a:t>11/15/2025</a:t>
             </a:fld>
             <a:endParaRPr lang="en-US"/>
           </a:p>
@@ -908,7 +910,7 @@
           <a:p>
             <a:fld id="{5BCAD085-E8A6-8845-BD4E-CB4CCA059FC4}" type="datetimeFigureOut">
               <a:rPr lang="en-US" smtClean="0"/>
-              <a:t>11/13/2025</a:t>
+              <a:t>11/15/2025</a:t>
             </a:fld>
             <a:endParaRPr lang="en-US"/>
           </a:p>
@@ -1078,7 +1080,7 @@
           <a:p>
             <a:fld id="{5BCAD085-E8A6-8845-BD4E-CB4CCA059FC4}" type="datetimeFigureOut">
               <a:rPr lang="en-US" smtClean="0"/>
-              <a:t>11/13/2025</a:t>
+              <a:t>11/15/2025</a:t>
             </a:fld>
             <a:endParaRPr lang="en-US"/>
           </a:p>
@@ -1403,7 +1405,7 @@
           <a:p>
             <a:fld id="{5BCAD085-E8A6-8845-BD4E-CB4CCA059FC4}" type="datetimeFigureOut">
               <a:rPr lang="en-US" smtClean="0"/>
-              <a:t>11/13/2025</a:t>
+              <a:t>11/15/2025</a:t>
             </a:fld>
             <a:endParaRPr lang="en-US"/>
           </a:p>
@@ -1801,7 +1803,7 @@
           <a:p>
             <a:fld id="{5BCAD085-E8A6-8845-BD4E-CB4CCA059FC4}" type="datetimeFigureOut">
               <a:rPr lang="en-US" smtClean="0"/>
-              <a:t>11/13/2025</a:t>
+              <a:t>11/15/2025</a:t>
             </a:fld>
             <a:endParaRPr lang="en-US"/>
           </a:p>
@@ -2235,7 +2237,7 @@
           <a:p>
             <a:fld id="{5BCAD085-E8A6-8845-BD4E-CB4CCA059FC4}" type="datetimeFigureOut">
               <a:rPr lang="en-US" smtClean="0"/>
-              <a:t>11/13/2025</a:t>
+              <a:t>11/15/2025</a:t>
             </a:fld>
             <a:endParaRPr lang="en-US"/>
           </a:p>
@@ -2363,7 +2365,7 @@
           <a:p>
             <a:fld id="{5BCAD085-E8A6-8845-BD4E-CB4CCA059FC4}" type="datetimeFigureOut">
               <a:rPr lang="en-US" smtClean="0"/>
-              <a:t>11/13/2025</a:t>
+              <a:t>11/15/2025</a:t>
             </a:fld>
             <a:endParaRPr lang="en-US"/>
           </a:p>
@@ -2468,7 +2470,7 @@
           <a:p>
             <a:fld id="{5BCAD085-E8A6-8845-BD4E-CB4CCA059FC4}" type="datetimeFigureOut">
               <a:rPr lang="en-US" smtClean="0"/>
-              <a:t>11/13/2025</a:t>
+              <a:t>11/15/2025</a:t>
             </a:fld>
             <a:endParaRPr lang="en-US"/>
           </a:p>
@@ -2909,7 +2911,7 @@
           <a:p>
             <a:fld id="{5BCAD085-E8A6-8845-BD4E-CB4CCA059FC4}" type="datetimeFigureOut">
               <a:rPr lang="en-US" smtClean="0"/>
-              <a:t>11/13/2025</a:t>
+              <a:t>11/15/2025</a:t>
             </a:fld>
             <a:endParaRPr lang="en-US"/>
           </a:p>
@@ -3336,7 +3338,7 @@
           <a:p>
             <a:fld id="{5BCAD085-E8A6-8845-BD4E-CB4CCA059FC4}" type="datetimeFigureOut">
               <a:rPr lang="en-US" smtClean="0"/>
-              <a:t>11/13/2025</a:t>
+              <a:t>11/15/2025</a:t>
             </a:fld>
             <a:endParaRPr lang="en-US"/>
           </a:p>
@@ -3621,7 +3623,7 @@
           <a:p>
             <a:fld id="{5BCAD085-E8A6-8845-BD4E-CB4CCA059FC4}" type="datetimeFigureOut">
               <a:rPr lang="en-US" smtClean="0"/>
-              <a:t>11/13/2025</a:t>
+              <a:t>11/15/2025</a:t>
             </a:fld>
             <a:endParaRPr lang="en-US"/>
           </a:p>
@@ -4688,6 +4690,103 @@
       </p:grpSpPr>
       <p:sp>
         <p:nvSpPr>
+          <p:cNvPr id="2" name="Title 1">
+            <a:extLst>
+              <a:ext uri="{FF2B5EF4-FFF2-40B4-BE49-F238E27FC236}">
+                <a16:creationId xmlns:a16="http://schemas.microsoft.com/office/drawing/2014/main" id="{9C76E83E-7DBD-7546-B95B-155EBE4506D0}"/>
+              </a:ext>
+            </a:extLst>
+          </p:cNvPr>
+          <p:cNvSpPr>
+            <a:spLocks noGrp="1"/>
+          </p:cNvSpPr>
+          <p:nvPr>
+            <p:ph type="title"/>
+          </p:nvPr>
+        </p:nvSpPr>
+        <p:spPr/>
+        <p:txBody>
+          <a:bodyPr/>
+          <a:lstStyle/>
+          <a:p>
+            <a:r>
+              <a:rPr lang="en-US" dirty="0">
+                <a:solidFill>
+                  <a:srgbClr val="0000CC"/>
+                </a:solidFill>
+              </a:rPr>
+              <a:t>Test set distribution</a:t>
+            </a:r>
+            <a:endParaRPr lang="en-IN" dirty="0">
+              <a:solidFill>
+                <a:srgbClr val="0000CC"/>
+              </a:solidFill>
+            </a:endParaRPr>
+          </a:p>
+        </p:txBody>
+      </p:sp>
+      <p:pic>
+        <p:nvPicPr>
+          <p:cNvPr id="5" name="Content Placeholder 4" descr="A close-up of a graph&#10;&#10;AI-generated content may be incorrect.">
+            <a:extLst>
+              <a:ext uri="{FF2B5EF4-FFF2-40B4-BE49-F238E27FC236}">
+                <a16:creationId xmlns:a16="http://schemas.microsoft.com/office/drawing/2014/main" id="{0E4B6DB6-4C9C-61CB-A49B-B26987C9DF0D}"/>
+              </a:ext>
+            </a:extLst>
+          </p:cNvPr>
+          <p:cNvPicPr>
+            <a:picLocks noGrp="1" noChangeAspect="1"/>
+          </p:cNvPicPr>
+          <p:nvPr>
+            <p:ph idx="1"/>
+          </p:nvPr>
+        </p:nvPicPr>
+        <p:blipFill>
+          <a:blip r:embed="rId2"/>
+          <a:srcRect l="58605" t="56439" r="3425" b="3837"/>
+          <a:stretch>
+            <a:fillRect/>
+          </a:stretch>
+        </p:blipFill>
+        <p:spPr>
+          <a:xfrm>
+            <a:off x="1612392" y="2545080"/>
+            <a:ext cx="5329428" cy="2956560"/>
+          </a:xfrm>
+        </p:spPr>
+      </p:pic>
+    </p:spTree>
+    <p:extLst>
+      <p:ext uri="{BB962C8B-B14F-4D97-AF65-F5344CB8AC3E}">
+        <p14:creationId xmlns:p14="http://schemas.microsoft.com/office/powerpoint/2010/main" val="767582050"/>
+      </p:ext>
+    </p:extLst>
+  </p:cSld>
+  <p:clrMapOvr>
+    <a:masterClrMapping/>
+  </p:clrMapOvr>
+</p:sld>
+</file>
+
+<file path=ppt/slides/slide13.xml><?xml version="1.0" encoding="utf-8"?>
+<p:sld xmlns:a="http://schemas.openxmlformats.org/drawingml/2006/main" xmlns:r="http://schemas.openxmlformats.org/officeDocument/2006/relationships" xmlns:p="http://schemas.openxmlformats.org/presentationml/2006/main">
+  <p:cSld>
+    <p:spTree>
+      <p:nvGrpSpPr>
+        <p:cNvPr id="1" name=""/>
+        <p:cNvGrpSpPr/>
+        <p:nvPr/>
+      </p:nvGrpSpPr>
+      <p:grpSpPr>
+        <a:xfrm>
+          <a:off x="0" y="0"/>
+          <a:ext cx="0" cy="0"/>
+          <a:chOff x="0" y="0"/>
+          <a:chExt cx="0" cy="0"/>
+        </a:xfrm>
+      </p:grpSpPr>
+      <p:sp>
+        <p:nvSpPr>
           <p:cNvPr id="2" name="Title 1"/>
           <p:cNvSpPr>
             <a:spLocks noGrp="1"/>
@@ -4709,6 +4808,7 @@
               </a:defRPr>
             </a:pPr>
             <a:r>
+              <a:rPr dirty="0"/>
               <a:t>Model Results &amp; Performance</a:t>
             </a:r>
           </a:p>
@@ -4730,54 +4830,6 @@
           <a:lstStyle/>
           <a:p>
             <a:endParaRPr dirty="0"/>
-          </a:p>
-          <a:p>
-            <a:pPr>
-              <a:spcAft>
-                <a:spcPts val="500"/>
-              </a:spcAft>
-              <a:defRPr sz="2000"/>
-            </a:pPr>
-            <a:r>
-              <a:rPr sz="3000" dirty="0"/>
-              <a:t>• Accuracy: ~95% on Kaggle dataset</a:t>
-            </a:r>
-          </a:p>
-          <a:p>
-            <a:pPr>
-              <a:spcAft>
-                <a:spcPts val="500"/>
-              </a:spcAft>
-              <a:defRPr sz="2000"/>
-            </a:pPr>
-            <a:r>
-              <a:rPr sz="3000" dirty="0"/>
-              <a:t>• Precision: 94%</a:t>
-            </a:r>
-          </a:p>
-          <a:p>
-            <a:pPr>
-              <a:spcAft>
-                <a:spcPts val="500"/>
-              </a:spcAft>
-              <a:defRPr sz="2000"/>
-            </a:pPr>
-            <a:r>
-              <a:rPr sz="3000" dirty="0"/>
-              <a:t>• Recall: 93%</a:t>
-            </a:r>
-          </a:p>
-          <a:p>
-            <a:pPr>
-              <a:spcAft>
-                <a:spcPts val="500"/>
-              </a:spcAft>
-              <a:defRPr sz="2000"/>
-            </a:pPr>
-            <a:r>
-              <a:rPr sz="3000" dirty="0"/>
-              <a:t>• F1-Score: 93.5%</a:t>
-            </a:r>
           </a:p>
           <a:p>
             <a:pPr marL="1671400" lvl="6" indent="0">
@@ -4791,6 +4843,68 @@
           </a:p>
         </p:txBody>
       </p:sp>
+      <p:pic>
+        <p:nvPicPr>
+          <p:cNvPr id="5" name="Picture 4" descr="A group of graphs and charts&#10;&#10;AI-generated content may be incorrect.">
+            <a:extLst>
+              <a:ext uri="{FF2B5EF4-FFF2-40B4-BE49-F238E27FC236}">
+                <a16:creationId xmlns:a16="http://schemas.microsoft.com/office/drawing/2014/main" id="{29C6EE1C-F9A8-15E7-D336-75C88C81A4F0}"/>
+              </a:ext>
+            </a:extLst>
+          </p:cNvPr>
+          <p:cNvPicPr>
+            <a:picLocks noChangeAspect="1"/>
+          </p:cNvPicPr>
+          <p:nvPr/>
+        </p:nvPicPr>
+        <p:blipFill>
+          <a:blip r:embed="rId2"/>
+          <a:srcRect r="67500" b="48421"/>
+          <a:stretch>
+            <a:fillRect/>
+          </a:stretch>
+        </p:blipFill>
+        <p:spPr>
+          <a:xfrm>
+            <a:off x="281940" y="3167635"/>
+            <a:ext cx="3596640" cy="3192780"/>
+          </a:xfrm>
+          <a:prstGeom prst="rect">
+            <a:avLst/>
+          </a:prstGeom>
+        </p:spPr>
+      </p:pic>
+      <p:pic>
+        <p:nvPicPr>
+          <p:cNvPr id="7" name="Picture 6" descr="A close-up of a graph&#10;&#10;AI-generated content may be incorrect.">
+            <a:extLst>
+              <a:ext uri="{FF2B5EF4-FFF2-40B4-BE49-F238E27FC236}">
+                <a16:creationId xmlns:a16="http://schemas.microsoft.com/office/drawing/2014/main" id="{6106738D-750D-D9EF-BAA0-C2977CC5D911}"/>
+              </a:ext>
+            </a:extLst>
+          </p:cNvPr>
+          <p:cNvPicPr>
+            <a:picLocks noChangeAspect="1"/>
+          </p:cNvPicPr>
+          <p:nvPr/>
+        </p:nvPicPr>
+        <p:blipFill>
+          <a:blip r:embed="rId3"/>
+          <a:srcRect l="47001" t="-48267" r="-1" b="48267"/>
+          <a:stretch>
+            <a:fillRect/>
+          </a:stretch>
+        </p:blipFill>
+        <p:spPr>
+          <a:xfrm>
+            <a:off x="4404360" y="401575"/>
+            <a:ext cx="4579620" cy="5958840"/>
+          </a:xfrm>
+          <a:prstGeom prst="rect">
+            <a:avLst/>
+          </a:prstGeom>
+        </p:spPr>
+      </p:pic>
     </p:spTree>
   </p:cSld>
   <p:clrMapOvr>
@@ -4799,7 +4913,67 @@
 </p:sld>
 </file>
 
-<file path=ppt/slides/slide13.xml><?xml version="1.0" encoding="utf-8"?>
+<file path=ppt/slides/slide14.xml><?xml version="1.0" encoding="utf-8"?>
+<p:sld xmlns:a="http://schemas.openxmlformats.org/drawingml/2006/main" xmlns:r="http://schemas.openxmlformats.org/officeDocument/2006/relationships" xmlns:p="http://schemas.openxmlformats.org/presentationml/2006/main">
+  <p:cSld>
+    <p:spTree>
+      <p:nvGrpSpPr>
+        <p:cNvPr id="1" name=""/>
+        <p:cNvGrpSpPr/>
+        <p:nvPr/>
+      </p:nvGrpSpPr>
+      <p:grpSpPr>
+        <a:xfrm>
+          <a:off x="0" y="0"/>
+          <a:ext cx="0" cy="0"/>
+          <a:chOff x="0" y="0"/>
+          <a:chExt cx="0" cy="0"/>
+        </a:xfrm>
+      </p:grpSpPr>
+      <p:pic>
+        <p:nvPicPr>
+          <p:cNvPr id="5" name="Content Placeholder 4" descr="A group of graphs and charts&#10;&#10;AI-generated content may be incorrect.">
+            <a:extLst>
+              <a:ext uri="{FF2B5EF4-FFF2-40B4-BE49-F238E27FC236}">
+                <a16:creationId xmlns:a16="http://schemas.microsoft.com/office/drawing/2014/main" id="{F5413C6C-EBF8-DB76-D251-F451D62606E2}"/>
+              </a:ext>
+            </a:extLst>
+          </p:cNvPr>
+          <p:cNvPicPr>
+            <a:picLocks noGrp="1" noChangeAspect="1"/>
+          </p:cNvPicPr>
+          <p:nvPr>
+            <p:ph idx="1"/>
+          </p:nvPr>
+        </p:nvPicPr>
+        <p:blipFill>
+          <a:blip r:embed="rId2"/>
+          <a:srcRect t="50567" r="63333"/>
+          <a:stretch>
+            <a:fillRect/>
+          </a:stretch>
+        </p:blipFill>
+        <p:spPr>
+          <a:xfrm>
+            <a:off x="865239" y="284151"/>
+            <a:ext cx="7400249" cy="5025267"/>
+          </a:xfrm>
+        </p:spPr>
+      </p:pic>
+    </p:spTree>
+    <p:extLst>
+      <p:ext uri="{BB962C8B-B14F-4D97-AF65-F5344CB8AC3E}">
+        <p14:creationId xmlns:p14="http://schemas.microsoft.com/office/powerpoint/2010/main" val="2442829924"/>
+      </p:ext>
+    </p:extLst>
+  </p:cSld>
+  <p:clrMapOvr>
+    <a:masterClrMapping/>
+  </p:clrMapOvr>
+</p:sld>
+</file>
+
+<file path=ppt/slides/slide15.xml><?xml version="1.0" encoding="utf-8"?>
 <p:sld xmlns:a="http://schemas.openxmlformats.org/drawingml/2006/main" xmlns:r="http://schemas.openxmlformats.org/officeDocument/2006/relationships" xmlns:p="http://schemas.openxmlformats.org/presentationml/2006/main">
   <p:cSld>
     <p:spTree>
@@ -5262,7 +5436,7 @@
             </a:pPr>
             <a:r>
               <a:rPr lang="en-US" sz="2600" dirty="0"/>
-              <a:t>Fake articles: 23,000+</a:t>
+              <a:t>Fake articles: 21,000+</a:t>
             </a:r>
           </a:p>
           <a:p>
@@ -5271,7 +5445,7 @@
             </a:pPr>
             <a:r>
               <a:rPr lang="en-US" sz="2600" dirty="0"/>
-              <a:t>Real articles: 21,000+</a:t>
+              <a:t>Real articles: 23,000+</a:t>
             </a:r>
           </a:p>
           <a:p>
@@ -5326,10 +5500,10 @@
       </p:grpSpPr>
       <p:sp>
         <p:nvSpPr>
-          <p:cNvPr id="2" name="Title 1">
+          <p:cNvPr id="4" name="Content Placeholder 3">
             <a:extLst>
               <a:ext uri="{FF2B5EF4-FFF2-40B4-BE49-F238E27FC236}">
-                <a16:creationId xmlns:a16="http://schemas.microsoft.com/office/drawing/2014/main" id="{6EFD652F-A634-3181-B20C-8C3D30197DCF}"/>
+                <a16:creationId xmlns:a16="http://schemas.microsoft.com/office/drawing/2014/main" id="{52597899-2180-6E50-DF9B-8B316BEE72E1}"/>
               </a:ext>
             </a:extLst>
           </p:cNvPr>
@@ -5337,62 +5511,75 @@
             <a:spLocks noGrp="1"/>
           </p:cNvSpPr>
           <p:nvPr>
-            <p:ph type="title"/>
+            <p:ph idx="1"/>
           </p:nvPr>
         </p:nvSpPr>
         <p:spPr>
           <a:xfrm>
-            <a:off x="616974" y="12684"/>
-            <a:ext cx="7772400" cy="1609344"/>
+            <a:off x="685800" y="383459"/>
+            <a:ext cx="7772400" cy="5788742"/>
           </a:xfrm>
         </p:spPr>
         <p:txBody>
           <a:bodyPr/>
           <a:lstStyle/>
           <a:p>
-            <a:r>
-              <a:rPr lang="en-US" dirty="0">
+            <a:pPr marL="548640" lvl="2" indent="0">
+              <a:buNone/>
+            </a:pPr>
+            <a:r>
+              <a:rPr lang="en-US" sz="3800" dirty="0">
                 <a:solidFill>
                   <a:srgbClr val="0000CC"/>
                 </a:solidFill>
+                <a:latin typeface="+mj-lt"/>
               </a:rPr>
-              <a:t>VISUALISATIONS OF DATASETs</a:t>
-            </a:r>
-            <a:endParaRPr lang="en-IN" dirty="0">
-              <a:solidFill>
-                <a:srgbClr val="0000CC"/>
-              </a:solidFill>
-            </a:endParaRPr>
+              <a:t>      Fake vs real news distribution:</a:t>
+            </a:r>
+          </a:p>
+          <a:p>
+            <a:pPr marL="0" indent="0" algn="ctr">
+              <a:buNone/>
+            </a:pPr>
+            <a:endParaRPr lang="en-US" dirty="0"/>
+          </a:p>
+          <a:p>
+            <a:pPr marL="0" indent="0">
+              <a:buNone/>
+            </a:pPr>
+            <a:endParaRPr lang="en-US" dirty="0"/>
           </a:p>
         </p:txBody>
       </p:sp>
       <p:pic>
         <p:nvPicPr>
-          <p:cNvPr id="5" name="Content Placeholder 4" descr="A group of graphs and charts">
+          <p:cNvPr id="8" name="Picture 7" descr="A group of graphs and charts&#10;&#10;AI-generated content may be incorrect.">
             <a:extLst>
               <a:ext uri="{FF2B5EF4-FFF2-40B4-BE49-F238E27FC236}">
-                <a16:creationId xmlns:a16="http://schemas.microsoft.com/office/drawing/2014/main" id="{98124FE6-969F-69BB-459A-323444544E50}"/>
+                <a16:creationId xmlns:a16="http://schemas.microsoft.com/office/drawing/2014/main" id="{97D359A2-C9F4-062D-A161-717AEF534E84}"/>
               </a:ext>
             </a:extLst>
           </p:cNvPr>
           <p:cNvPicPr>
-            <a:picLocks noGrp="1" noChangeAspect="1"/>
+            <a:picLocks noChangeAspect="1"/>
           </p:cNvPicPr>
-          <p:nvPr>
-            <p:ph idx="1"/>
-          </p:nvPr>
+          <p:nvPr/>
         </p:nvPicPr>
         <p:blipFill>
           <a:blip r:embed="rId2"/>
+          <a:srcRect l="34302" r="31934" b="48609"/>
           <a:stretch>
             <a:fillRect/>
           </a:stretch>
         </p:blipFill>
         <p:spPr>
           <a:xfrm>
-            <a:off x="330390" y="1789176"/>
-            <a:ext cx="8127810" cy="4700114"/>
+            <a:off x="1974145" y="1799303"/>
+            <a:ext cx="5195709" cy="3490451"/>
           </a:xfrm>
+          <a:prstGeom prst="rect">
+            <a:avLst/>
+          </a:prstGeom>
         </p:spPr>
       </p:pic>
     </p:spTree>
@@ -5425,19 +5612,58 @@
           <a:chExt cx="0" cy="0"/>
         </a:xfrm>
       </p:grpSpPr>
+      <p:sp>
+        <p:nvSpPr>
+          <p:cNvPr id="2" name="Title 1">
+            <a:extLst>
+              <a:ext uri="{FF2B5EF4-FFF2-40B4-BE49-F238E27FC236}">
+                <a16:creationId xmlns:a16="http://schemas.microsoft.com/office/drawing/2014/main" id="{D8529734-4741-95D1-1C75-2D19C216B780}"/>
+              </a:ext>
+            </a:extLst>
+          </p:cNvPr>
+          <p:cNvSpPr>
+            <a:spLocks noGrp="1"/>
+          </p:cNvSpPr>
+          <p:nvPr>
+            <p:ph type="title"/>
+          </p:nvPr>
+        </p:nvSpPr>
+        <p:spPr/>
+        <p:txBody>
+          <a:bodyPr/>
+          <a:lstStyle/>
+          <a:p>
+            <a:r>
+              <a:rPr lang="en-US" dirty="0">
+                <a:solidFill>
+                  <a:srgbClr val="0000CC"/>
+                </a:solidFill>
+              </a:rPr>
+              <a:t>DETAILS OF ARTICLES IN DATASET</a:t>
+            </a:r>
+            <a:endParaRPr lang="en-IN" dirty="0">
+              <a:solidFill>
+                <a:srgbClr val="0000CC"/>
+              </a:solidFill>
+            </a:endParaRPr>
+          </a:p>
+        </p:txBody>
+      </p:sp>
       <p:pic>
         <p:nvPicPr>
-          <p:cNvPr id="3" name="Picture 2" descr="A close-up of a graph&#10;&#10;AI-generated content may be incorrect.">
+          <p:cNvPr id="4" name="Content Placeholder 3">
             <a:extLst>
               <a:ext uri="{FF2B5EF4-FFF2-40B4-BE49-F238E27FC236}">
-                <a16:creationId xmlns:a16="http://schemas.microsoft.com/office/drawing/2014/main" id="{03100214-4FD0-54AD-ABF0-D749C5EBFDD8}"/>
+                <a16:creationId xmlns:a16="http://schemas.microsoft.com/office/drawing/2014/main" id="{6AE0497F-B20D-11FB-D612-CF86A317798A}"/>
               </a:ext>
             </a:extLst>
           </p:cNvPr>
           <p:cNvPicPr>
-            <a:picLocks noChangeAspect="1"/>
+            <a:picLocks noGrp="1" noChangeAspect="1"/>
           </p:cNvPicPr>
-          <p:nvPr/>
+          <p:nvPr>
+            <p:ph idx="1"/>
+          </p:nvPr>
         </p:nvPicPr>
         <p:blipFill>
           <a:blip r:embed="rId2"/>
@@ -5447,8 +5673,8 @@
         </p:blipFill>
         <p:spPr>
           <a:xfrm>
-            <a:off x="0" y="587308"/>
-            <a:ext cx="9144000" cy="5683383"/>
+            <a:off x="1112341" y="1653540"/>
+            <a:ext cx="7010579" cy="4152900"/>
           </a:xfrm>
           <a:prstGeom prst="rect">
             <a:avLst/>
@@ -5458,7 +5684,7 @@
     </p:spTree>
     <p:extLst>
       <p:ext uri="{BB962C8B-B14F-4D97-AF65-F5344CB8AC3E}">
-        <p14:creationId xmlns:p14="http://schemas.microsoft.com/office/powerpoint/2010/main" val="3470960452"/>
+        <p14:creationId xmlns:p14="http://schemas.microsoft.com/office/powerpoint/2010/main" val="349422420"/>
       </p:ext>
     </p:extLst>
   </p:cSld>
@@ -5508,6 +5734,7 @@
               </a:defRPr>
             </a:pPr>
             <a:r>
+              <a:rPr dirty="0"/>
               <a:t>Backend (Flask Application)</a:t>
             </a:r>
           </a:p>

--- a/Fake news detection presentation.pptx
+++ b/Fake news detection presentation.pptx
@@ -11,15 +11,17 @@
     <p:sldId id="269" r:id="rId5"/>
     <p:sldId id="270" r:id="rId6"/>
     <p:sldId id="273" r:id="rId7"/>
-    <p:sldId id="259" r:id="rId8"/>
-    <p:sldId id="260" r:id="rId9"/>
-    <p:sldId id="261" r:id="rId10"/>
-    <p:sldId id="262" r:id="rId11"/>
-    <p:sldId id="264" r:id="rId12"/>
-    <p:sldId id="272" r:id="rId13"/>
-    <p:sldId id="265" r:id="rId14"/>
-    <p:sldId id="271" r:id="rId15"/>
-    <p:sldId id="267" r:id="rId16"/>
+    <p:sldId id="275" r:id="rId8"/>
+    <p:sldId id="276" r:id="rId9"/>
+    <p:sldId id="259" r:id="rId10"/>
+    <p:sldId id="260" r:id="rId11"/>
+    <p:sldId id="261" r:id="rId12"/>
+    <p:sldId id="262" r:id="rId13"/>
+    <p:sldId id="264" r:id="rId14"/>
+    <p:sldId id="272" r:id="rId15"/>
+    <p:sldId id="265" r:id="rId16"/>
+    <p:sldId id="274" r:id="rId17"/>
+    <p:sldId id="267" r:id="rId18"/>
   </p:sldIdLst>
   <p:sldSz cx="9144000" cy="6858000" type="screen4x3"/>
   <p:notesSz cx="6858000" cy="9144000"/>
@@ -542,7 +544,7 @@
           <a:p>
             <a:fld id="{5BCAD085-E8A6-8845-BD4E-CB4CCA059FC4}" type="datetimeFigureOut">
               <a:rPr lang="en-US" smtClean="0"/>
-              <a:t>11/15/2025</a:t>
+              <a:t>11/16/2025</a:t>
             </a:fld>
             <a:endParaRPr lang="en-US"/>
           </a:p>
@@ -726,7 +728,7 @@
           <a:p>
             <a:fld id="{5BCAD085-E8A6-8845-BD4E-CB4CCA059FC4}" type="datetimeFigureOut">
               <a:rPr lang="en-US" smtClean="0"/>
-              <a:t>11/15/2025</a:t>
+              <a:t>11/16/2025</a:t>
             </a:fld>
             <a:endParaRPr lang="en-US"/>
           </a:p>
@@ -910,7 +912,7 @@
           <a:p>
             <a:fld id="{5BCAD085-E8A6-8845-BD4E-CB4CCA059FC4}" type="datetimeFigureOut">
               <a:rPr lang="en-US" smtClean="0"/>
-              <a:t>11/15/2025</a:t>
+              <a:t>11/16/2025</a:t>
             </a:fld>
             <a:endParaRPr lang="en-US"/>
           </a:p>
@@ -1080,7 +1082,7 @@
           <a:p>
             <a:fld id="{5BCAD085-E8A6-8845-BD4E-CB4CCA059FC4}" type="datetimeFigureOut">
               <a:rPr lang="en-US" smtClean="0"/>
-              <a:t>11/15/2025</a:t>
+              <a:t>11/16/2025</a:t>
             </a:fld>
             <a:endParaRPr lang="en-US"/>
           </a:p>
@@ -1405,7 +1407,7 @@
           <a:p>
             <a:fld id="{5BCAD085-E8A6-8845-BD4E-CB4CCA059FC4}" type="datetimeFigureOut">
               <a:rPr lang="en-US" smtClean="0"/>
-              <a:t>11/15/2025</a:t>
+              <a:t>11/16/2025</a:t>
             </a:fld>
             <a:endParaRPr lang="en-US"/>
           </a:p>
@@ -1803,7 +1805,7 @@
           <a:p>
             <a:fld id="{5BCAD085-E8A6-8845-BD4E-CB4CCA059FC4}" type="datetimeFigureOut">
               <a:rPr lang="en-US" smtClean="0"/>
-              <a:t>11/15/2025</a:t>
+              <a:t>11/16/2025</a:t>
             </a:fld>
             <a:endParaRPr lang="en-US"/>
           </a:p>
@@ -2237,7 +2239,7 @@
           <a:p>
             <a:fld id="{5BCAD085-E8A6-8845-BD4E-CB4CCA059FC4}" type="datetimeFigureOut">
               <a:rPr lang="en-US" smtClean="0"/>
-              <a:t>11/15/2025</a:t>
+              <a:t>11/16/2025</a:t>
             </a:fld>
             <a:endParaRPr lang="en-US"/>
           </a:p>
@@ -2365,7 +2367,7 @@
           <a:p>
             <a:fld id="{5BCAD085-E8A6-8845-BD4E-CB4CCA059FC4}" type="datetimeFigureOut">
               <a:rPr lang="en-US" smtClean="0"/>
-              <a:t>11/15/2025</a:t>
+              <a:t>11/16/2025</a:t>
             </a:fld>
             <a:endParaRPr lang="en-US"/>
           </a:p>
@@ -2470,7 +2472,7 @@
           <a:p>
             <a:fld id="{5BCAD085-E8A6-8845-BD4E-CB4CCA059FC4}" type="datetimeFigureOut">
               <a:rPr lang="en-US" smtClean="0"/>
-              <a:t>11/15/2025</a:t>
+              <a:t>11/16/2025</a:t>
             </a:fld>
             <a:endParaRPr lang="en-US"/>
           </a:p>
@@ -2911,7 +2913,7 @@
           <a:p>
             <a:fld id="{5BCAD085-E8A6-8845-BD4E-CB4CCA059FC4}" type="datetimeFigureOut">
               <a:rPr lang="en-US" smtClean="0"/>
-              <a:t>11/15/2025</a:t>
+              <a:t>11/16/2025</a:t>
             </a:fld>
             <a:endParaRPr lang="en-US"/>
           </a:p>
@@ -3338,7 +3340,7 @@
           <a:p>
             <a:fld id="{5BCAD085-E8A6-8845-BD4E-CB4CCA059FC4}" type="datetimeFigureOut">
               <a:rPr lang="en-US" smtClean="0"/>
-              <a:t>11/15/2025</a:t>
+              <a:t>11/16/2025</a:t>
             </a:fld>
             <a:endParaRPr lang="en-US"/>
           </a:p>
@@ -3623,7 +3625,7 @@
           <a:p>
             <a:fld id="{5BCAD085-E8A6-8845-BD4E-CB4CCA059FC4}" type="datetimeFigureOut">
               <a:rPr lang="en-US" smtClean="0"/>
-              <a:t>11/15/2025</a:t>
+              <a:t>11/16/2025</a:t>
             </a:fld>
             <a:endParaRPr lang="en-US"/>
           </a:p>
@@ -4202,8 +4204,7 @@
               </a:defRPr>
             </a:pPr>
             <a:r>
-              <a:rPr dirty="0"/>
-              <a:t>System Workflow</a:t>
+              <a:t>Machine Learning Model</a:t>
             </a:r>
           </a:p>
         </p:txBody>
@@ -4218,323 +4219,56 @@
             <p:ph idx="1"/>
           </p:nvPr>
         </p:nvSpPr>
-        <p:spPr>
-          <a:xfrm>
-            <a:off x="457200" y="1573327"/>
-            <a:ext cx="8229600" cy="4525963"/>
-          </a:xfrm>
-        </p:spPr>
-        <p:txBody>
-          <a:bodyPr>
-            <a:normAutofit lnSpcReduction="10000"/>
-          </a:bodyPr>
-          <a:lstStyle/>
-          <a:p>
-            <a:pPr marL="0" indent="0" algn="ctr">
-              <a:buNone/>
-            </a:pPr>
-            <a:r>
-              <a:rPr lang="en-IN" sz="2300" dirty="0">
-                <a:latin typeface="Times New Roman" panose="02020603050405020304" pitchFamily="18" charset="0"/>
-                <a:cs typeface="Times New Roman" panose="02020603050405020304" pitchFamily="18" charset="0"/>
-              </a:rPr>
-              <a:t>User inputs news text on the frontend</a:t>
-            </a:r>
-          </a:p>
-          <a:p>
-            <a:pPr marL="0" indent="0" algn="ctr">
+        <p:spPr/>
+        <p:txBody>
+          <a:bodyPr/>
+          <a:lstStyle/>
+          <a:p>
+            <a:endParaRPr/>
+          </a:p>
+          <a:p>
+            <a:pPr>
               <a:spcAft>
                 <a:spcPts val="500"/>
               </a:spcAft>
-              <a:buNone/>
               <a:defRPr sz="2000"/>
             </a:pPr>
-            <a:endParaRPr lang="en-IN" sz="2300" dirty="0">
-              <a:latin typeface="Times New Roman" panose="02020603050405020304" pitchFamily="18" charset="0"/>
-              <a:cs typeface="Times New Roman" panose="02020603050405020304" pitchFamily="18" charset="0"/>
-            </a:endParaRPr>
-          </a:p>
-          <a:p>
-            <a:pPr marL="0" indent="0" algn="ctr">
+            <a:r>
+              <a:t>• Text preprocessing includes cleaning URLs, punctuation, and hashtags</a:t>
+            </a:r>
+          </a:p>
+          <a:p>
+            <a:pPr>
               <a:spcAft>
                 <a:spcPts val="500"/>
               </a:spcAft>
-              <a:buNone/>
               <a:defRPr sz="2000"/>
             </a:pPr>
             <a:r>
-              <a:rPr lang="en-IN" sz="2300" dirty="0">
-                <a:latin typeface="Times New Roman" panose="02020603050405020304" pitchFamily="18" charset="0"/>
-                <a:cs typeface="Times New Roman" panose="02020603050405020304" pitchFamily="18" charset="0"/>
-              </a:rPr>
-              <a:t>Text sent to Flask backend via POST request</a:t>
-            </a:r>
-          </a:p>
-          <a:p>
-            <a:pPr marL="0" indent="0" algn="ctr">
+              <a:t>• TF-IDF Vectorizer extracts features from text</a:t>
+            </a:r>
+          </a:p>
+          <a:p>
+            <a:pPr>
               <a:spcAft>
                 <a:spcPts val="500"/>
               </a:spcAft>
-              <a:buNone/>
               <a:defRPr sz="2000"/>
             </a:pPr>
             <a:r>
-              <a:rPr lang="en-IN" sz="2300" dirty="0">
-                <a:latin typeface="Times New Roman" panose="02020603050405020304" pitchFamily="18" charset="0"/>
-                <a:cs typeface="Times New Roman" panose="02020603050405020304" pitchFamily="18" charset="0"/>
-              </a:rPr>
-              <a:t>			</a:t>
-            </a:r>
-          </a:p>
-          <a:p>
-            <a:pPr marL="0" indent="0" algn="ctr">
+              <a:t>• Logistic Regression classifier predicts fake vs. real</a:t>
+            </a:r>
+          </a:p>
+          <a:p>
+            <a:pPr>
               <a:spcAft>
                 <a:spcPts val="500"/>
               </a:spcAft>
-              <a:buNone/>
               <a:defRPr sz="2000"/>
             </a:pPr>
             <a:r>
-              <a:rPr lang="en-IN" sz="2300" dirty="0">
-                <a:latin typeface="Times New Roman" panose="02020603050405020304" pitchFamily="18" charset="0"/>
-                <a:cs typeface="Times New Roman" panose="02020603050405020304" pitchFamily="18" charset="0"/>
-              </a:rPr>
-              <a:t>Text cleaned and transformed using TF-IDF</a:t>
-            </a:r>
-          </a:p>
-          <a:p>
-            <a:pPr marL="0" indent="0" algn="ctr">
-              <a:spcAft>
-                <a:spcPts val="500"/>
-              </a:spcAft>
-              <a:buNone/>
-              <a:defRPr sz="2000"/>
-            </a:pPr>
-            <a:endParaRPr lang="en-IN" sz="2300" dirty="0">
-              <a:latin typeface="Times New Roman" panose="02020603050405020304" pitchFamily="18" charset="0"/>
-              <a:cs typeface="Times New Roman" panose="02020603050405020304" pitchFamily="18" charset="0"/>
-            </a:endParaRPr>
-          </a:p>
-          <a:p>
-            <a:pPr marL="0" indent="0" algn="ctr">
-              <a:spcAft>
-                <a:spcPts val="500"/>
-              </a:spcAft>
-              <a:buNone/>
-              <a:defRPr sz="2000"/>
-            </a:pPr>
-            <a:r>
-              <a:rPr lang="en-IN" sz="2300" dirty="0">
-                <a:latin typeface="Times New Roman" panose="02020603050405020304" pitchFamily="18" charset="0"/>
-                <a:cs typeface="Times New Roman" panose="02020603050405020304" pitchFamily="18" charset="0"/>
-              </a:rPr>
-              <a:t>Logistic Regression model predicts authenticity</a:t>
-            </a:r>
-          </a:p>
-          <a:p>
-            <a:pPr marL="0" indent="0" algn="ctr">
-              <a:spcAft>
-                <a:spcPts val="500"/>
-              </a:spcAft>
-              <a:buNone/>
-              <a:defRPr sz="2000"/>
-            </a:pPr>
-            <a:endParaRPr lang="en-IN" sz="2300" dirty="0">
-              <a:latin typeface="Times New Roman" panose="02020603050405020304" pitchFamily="18" charset="0"/>
-              <a:cs typeface="Times New Roman" panose="02020603050405020304" pitchFamily="18" charset="0"/>
-            </a:endParaRPr>
-          </a:p>
-          <a:p>
-            <a:pPr marL="0" indent="0" algn="ctr">
-              <a:spcAft>
-                <a:spcPts val="500"/>
-              </a:spcAft>
-              <a:buNone/>
-              <a:defRPr sz="2000"/>
-            </a:pPr>
-            <a:r>
-              <a:rPr lang="en-IN" sz="2300" dirty="0">
-                <a:latin typeface="Times New Roman" panose="02020603050405020304" pitchFamily="18" charset="0"/>
-                <a:cs typeface="Times New Roman" panose="02020603050405020304" pitchFamily="18" charset="0"/>
-              </a:rPr>
-              <a:t>Frontend displays result with confidence levels</a:t>
-            </a:r>
-          </a:p>
-        </p:txBody>
-      </p:sp>
-      <p:sp>
-        <p:nvSpPr>
-          <p:cNvPr id="10" name="Arrow: Down 9">
-            <a:extLst>
-              <a:ext uri="{FF2B5EF4-FFF2-40B4-BE49-F238E27FC236}">
-                <a16:creationId xmlns:a16="http://schemas.microsoft.com/office/drawing/2014/main" id="{705F5EF0-10CA-B82E-C62D-1C66A66AEBBD}"/>
-              </a:ext>
-            </a:extLst>
-          </p:cNvPr>
-          <p:cNvSpPr/>
-          <p:nvPr/>
-        </p:nvSpPr>
-        <p:spPr>
-          <a:xfrm>
-            <a:off x="4311445" y="2146513"/>
-            <a:ext cx="442452" cy="216310"/>
-          </a:xfrm>
-          <a:prstGeom prst="downArrow">
-            <a:avLst/>
-          </a:prstGeom>
-        </p:spPr>
-        <p:style>
-          <a:lnRef idx="1">
-            <a:schemeClr val="accent1"/>
-          </a:lnRef>
-          <a:fillRef idx="3">
-            <a:schemeClr val="accent1"/>
-          </a:fillRef>
-          <a:effectRef idx="2">
-            <a:schemeClr val="accent1"/>
-          </a:effectRef>
-          <a:fontRef idx="minor">
-            <a:schemeClr val="lt1"/>
-          </a:fontRef>
-        </p:style>
-        <p:txBody>
-          <a:bodyPr rtlCol="0" anchor="ctr"/>
-          <a:lstStyle/>
-          <a:p>
-            <a:pPr algn="ctr"/>
-            <a:endParaRPr lang="en-IN" dirty="0"/>
-          </a:p>
-        </p:txBody>
-      </p:sp>
-      <p:sp>
-        <p:nvSpPr>
-          <p:cNvPr id="11" name="Arrow: Down 10">
-            <a:extLst>
-              <a:ext uri="{FF2B5EF4-FFF2-40B4-BE49-F238E27FC236}">
-                <a16:creationId xmlns:a16="http://schemas.microsoft.com/office/drawing/2014/main" id="{1B70830B-C1EB-219C-B081-212C8CB440F8}"/>
-              </a:ext>
-            </a:extLst>
-          </p:cNvPr>
-          <p:cNvSpPr/>
-          <p:nvPr/>
-        </p:nvSpPr>
-        <p:spPr>
-          <a:xfrm>
-            <a:off x="4311445" y="3177716"/>
-            <a:ext cx="442452" cy="216310"/>
-          </a:xfrm>
-          <a:prstGeom prst="downArrow">
-            <a:avLst/>
-          </a:prstGeom>
-        </p:spPr>
-        <p:style>
-          <a:lnRef idx="1">
-            <a:schemeClr val="accent1"/>
-          </a:lnRef>
-          <a:fillRef idx="3">
-            <a:schemeClr val="accent1"/>
-          </a:fillRef>
-          <a:effectRef idx="2">
-            <a:schemeClr val="accent1"/>
-          </a:effectRef>
-          <a:fontRef idx="minor">
-            <a:schemeClr val="lt1"/>
-          </a:fontRef>
-        </p:style>
-        <p:txBody>
-          <a:bodyPr rtlCol="0" anchor="ctr"/>
-          <a:lstStyle/>
-          <a:p>
-            <a:pPr algn="ctr"/>
-            <a:endParaRPr lang="en-IN" dirty="0"/>
-          </a:p>
-        </p:txBody>
-      </p:sp>
-      <p:sp>
-        <p:nvSpPr>
-          <p:cNvPr id="13" name="Arrow: Down 12">
-            <a:extLst>
-              <a:ext uri="{FF2B5EF4-FFF2-40B4-BE49-F238E27FC236}">
-                <a16:creationId xmlns:a16="http://schemas.microsoft.com/office/drawing/2014/main" id="{60B72F4F-2068-50B6-F00B-D86BD684A16F}"/>
-              </a:ext>
-            </a:extLst>
-          </p:cNvPr>
-          <p:cNvSpPr/>
-          <p:nvPr/>
-        </p:nvSpPr>
-        <p:spPr>
-          <a:xfrm>
-            <a:off x="4291780" y="4987854"/>
-            <a:ext cx="442452" cy="216310"/>
-          </a:xfrm>
-          <a:prstGeom prst="downArrow">
-            <a:avLst/>
-          </a:prstGeom>
-        </p:spPr>
-        <p:style>
-          <a:lnRef idx="1">
-            <a:schemeClr val="accent1"/>
-          </a:lnRef>
-          <a:fillRef idx="3">
-            <a:schemeClr val="accent1"/>
-          </a:fillRef>
-          <a:effectRef idx="2">
-            <a:schemeClr val="accent1"/>
-          </a:effectRef>
-          <a:fontRef idx="minor">
-            <a:schemeClr val="lt1"/>
-          </a:fontRef>
-        </p:style>
-        <p:txBody>
-          <a:bodyPr rtlCol="0" anchor="ctr"/>
-          <a:lstStyle/>
-          <a:p>
-            <a:pPr algn="ctr"/>
-            <a:endParaRPr lang="en-IN" dirty="0"/>
-          </a:p>
-        </p:txBody>
-      </p:sp>
-      <p:sp>
-        <p:nvSpPr>
-          <p:cNvPr id="14" name="Arrow: Down 13">
-            <a:extLst>
-              <a:ext uri="{FF2B5EF4-FFF2-40B4-BE49-F238E27FC236}">
-                <a16:creationId xmlns:a16="http://schemas.microsoft.com/office/drawing/2014/main" id="{EE862FF5-8828-5415-ED6E-30CF249E605D}"/>
-              </a:ext>
-            </a:extLst>
-          </p:cNvPr>
-          <p:cNvSpPr/>
-          <p:nvPr/>
-        </p:nvSpPr>
-        <p:spPr>
-          <a:xfrm>
-            <a:off x="4311445" y="4092729"/>
-            <a:ext cx="442452" cy="216310"/>
-          </a:xfrm>
-          <a:prstGeom prst="downArrow">
-            <a:avLst/>
-          </a:prstGeom>
-        </p:spPr>
-        <p:style>
-          <a:lnRef idx="1">
-            <a:schemeClr val="accent1"/>
-          </a:lnRef>
-          <a:fillRef idx="3">
-            <a:schemeClr val="accent1"/>
-          </a:fillRef>
-          <a:effectRef idx="2">
-            <a:schemeClr val="accent1"/>
-          </a:effectRef>
-          <a:fontRef idx="minor">
-            <a:schemeClr val="lt1"/>
-          </a:fontRef>
-        </p:style>
-        <p:txBody>
-          <a:bodyPr rtlCol="0" anchor="ctr"/>
-          <a:lstStyle/>
-          <a:p>
-            <a:pPr algn="ctr"/>
-            <a:endParaRPr lang="en-IN" dirty="0"/>
+              <a:t>• Model evaluated on Accuracy, Precision, Recall, and F1-score</a:t>
+            </a:r>
           </a:p>
         </p:txBody>
       </p:sp>
@@ -4586,7 +4320,7 @@
               </a:defRPr>
             </a:pPr>
             <a:r>
-              <a:t>Technologies Used</a:t>
+              <a:t>Frontend (React Application)</a:t>
             </a:r>
           </a:p>
         </p:txBody>
@@ -4601,17 +4335,12 @@
             <p:ph idx="1"/>
           </p:nvPr>
         </p:nvSpPr>
-        <p:spPr>
-          <a:xfrm>
-            <a:off x="607142" y="2807208"/>
-            <a:ext cx="7772400" cy="4050792"/>
-          </a:xfrm>
-        </p:spPr>
+        <p:spPr/>
         <p:txBody>
           <a:bodyPr/>
           <a:lstStyle/>
           <a:p>
-            <a:endParaRPr dirty="0"/>
+            <a:endParaRPr/>
           </a:p>
           <a:p>
             <a:pPr>
@@ -4621,8 +4350,7 @@
               <a:defRPr sz="2000"/>
             </a:pPr>
             <a:r>
-              <a:rPr sz="2500" dirty="0"/>
-              <a:t>🔹 Backend: Python, Flask, Pandas, Scikit-learn</a:t>
+              <a:t>• Developed using React and Tailwind CSS</a:t>
             </a:r>
           </a:p>
           <a:p>
@@ -4633,8 +4361,7 @@
               <a:defRPr sz="2000"/>
             </a:pPr>
             <a:r>
-              <a:rPr sz="2500" dirty="0"/>
-              <a:t>🔹 Frontend: React.js, Tailwind CSS, Babel</a:t>
+              <a:t>• Connects to Flask backend for real-time predictions</a:t>
             </a:r>
           </a:p>
           <a:p>
@@ -4645,8 +4372,7 @@
               <a:defRPr sz="2000"/>
             </a:pPr>
             <a:r>
-              <a:rPr sz="2500" dirty="0"/>
-              <a:t>🔹 Model Storage: Pickle</a:t>
+              <a:t>• Displays live model metrics (accuracy, F1-score, etc.)</a:t>
             </a:r>
           </a:p>
           <a:p>
@@ -4657,8 +4383,7 @@
               <a:defRPr sz="2000"/>
             </a:pPr>
             <a:r>
-              <a:rPr sz="2500" dirty="0"/>
-              <a:t>🔹 Communication: RESTful APIs with JSON</a:t>
+              <a:t>• Interactive design with example news articles and visual confidence bars</a:t>
             </a:r>
           </a:p>
         </p:txBody>
@@ -4690,77 +4415,364 @@
       </p:grpSpPr>
       <p:sp>
         <p:nvSpPr>
-          <p:cNvPr id="2" name="Title 1">
+          <p:cNvPr id="2" name="Title 1"/>
+          <p:cNvSpPr>
+            <a:spLocks noGrp="1"/>
+          </p:cNvSpPr>
+          <p:nvPr>
+            <p:ph type="title"/>
+          </p:nvPr>
+        </p:nvSpPr>
+        <p:spPr/>
+        <p:txBody>
+          <a:bodyPr/>
+          <a:lstStyle/>
+          <a:p>
+            <a:pPr>
+              <a:defRPr sz="3600" b="1">
+                <a:solidFill>
+                  <a:srgbClr val="003399"/>
+                </a:solidFill>
+              </a:defRPr>
+            </a:pPr>
+            <a:r>
+              <a:rPr dirty="0"/>
+              <a:t>System Workflow</a:t>
+            </a:r>
+          </a:p>
+        </p:txBody>
+      </p:sp>
+      <p:sp>
+        <p:nvSpPr>
+          <p:cNvPr id="3" name="Content Placeholder 2"/>
+          <p:cNvSpPr>
+            <a:spLocks noGrp="1"/>
+          </p:cNvSpPr>
+          <p:nvPr>
+            <p:ph idx="1"/>
+          </p:nvPr>
+        </p:nvSpPr>
+        <p:spPr>
+          <a:xfrm>
+            <a:off x="457200" y="1573327"/>
+            <a:ext cx="8229600" cy="4525963"/>
+          </a:xfrm>
+        </p:spPr>
+        <p:txBody>
+          <a:bodyPr>
+            <a:normAutofit lnSpcReduction="10000"/>
+          </a:bodyPr>
+          <a:lstStyle/>
+          <a:p>
+            <a:pPr marL="0" indent="0" algn="ctr">
+              <a:buNone/>
+            </a:pPr>
+            <a:r>
+              <a:rPr lang="en-IN" sz="2300" dirty="0">
+                <a:latin typeface="Times New Roman" panose="02020603050405020304" pitchFamily="18" charset="0"/>
+                <a:cs typeface="Times New Roman" panose="02020603050405020304" pitchFamily="18" charset="0"/>
+              </a:rPr>
+              <a:t>User inputs news text on the frontend</a:t>
+            </a:r>
+          </a:p>
+          <a:p>
+            <a:pPr marL="0" indent="0" algn="ctr">
+              <a:spcAft>
+                <a:spcPts val="500"/>
+              </a:spcAft>
+              <a:buNone/>
+              <a:defRPr sz="2000"/>
+            </a:pPr>
+            <a:endParaRPr lang="en-IN" sz="2300" dirty="0">
+              <a:latin typeface="Times New Roman" panose="02020603050405020304" pitchFamily="18" charset="0"/>
+              <a:cs typeface="Times New Roman" panose="02020603050405020304" pitchFamily="18" charset="0"/>
+            </a:endParaRPr>
+          </a:p>
+          <a:p>
+            <a:pPr marL="0" indent="0" algn="ctr">
+              <a:spcAft>
+                <a:spcPts val="500"/>
+              </a:spcAft>
+              <a:buNone/>
+              <a:defRPr sz="2000"/>
+            </a:pPr>
+            <a:r>
+              <a:rPr lang="en-IN" sz="2300" dirty="0">
+                <a:latin typeface="Times New Roman" panose="02020603050405020304" pitchFamily="18" charset="0"/>
+                <a:cs typeface="Times New Roman" panose="02020603050405020304" pitchFamily="18" charset="0"/>
+              </a:rPr>
+              <a:t>Text sent to Flask backend via POST request</a:t>
+            </a:r>
+          </a:p>
+          <a:p>
+            <a:pPr marL="0" indent="0" algn="ctr">
+              <a:spcAft>
+                <a:spcPts val="500"/>
+              </a:spcAft>
+              <a:buNone/>
+              <a:defRPr sz="2000"/>
+            </a:pPr>
+            <a:r>
+              <a:rPr lang="en-IN" sz="2300" dirty="0">
+                <a:latin typeface="Times New Roman" panose="02020603050405020304" pitchFamily="18" charset="0"/>
+                <a:cs typeface="Times New Roman" panose="02020603050405020304" pitchFamily="18" charset="0"/>
+              </a:rPr>
+              <a:t>			</a:t>
+            </a:r>
+          </a:p>
+          <a:p>
+            <a:pPr marL="0" indent="0" algn="ctr">
+              <a:spcAft>
+                <a:spcPts val="500"/>
+              </a:spcAft>
+              <a:buNone/>
+              <a:defRPr sz="2000"/>
+            </a:pPr>
+            <a:r>
+              <a:rPr lang="en-IN" sz="2300" dirty="0">
+                <a:latin typeface="Times New Roman" panose="02020603050405020304" pitchFamily="18" charset="0"/>
+                <a:cs typeface="Times New Roman" panose="02020603050405020304" pitchFamily="18" charset="0"/>
+              </a:rPr>
+              <a:t>Text cleaned and transformed using TF-IDF</a:t>
+            </a:r>
+          </a:p>
+          <a:p>
+            <a:pPr marL="0" indent="0" algn="ctr">
+              <a:spcAft>
+                <a:spcPts val="500"/>
+              </a:spcAft>
+              <a:buNone/>
+              <a:defRPr sz="2000"/>
+            </a:pPr>
+            <a:endParaRPr lang="en-IN" sz="2300" dirty="0">
+              <a:latin typeface="Times New Roman" panose="02020603050405020304" pitchFamily="18" charset="0"/>
+              <a:cs typeface="Times New Roman" panose="02020603050405020304" pitchFamily="18" charset="0"/>
+            </a:endParaRPr>
+          </a:p>
+          <a:p>
+            <a:pPr marL="0" indent="0" algn="ctr">
+              <a:spcAft>
+                <a:spcPts val="500"/>
+              </a:spcAft>
+              <a:buNone/>
+              <a:defRPr sz="2000"/>
+            </a:pPr>
+            <a:r>
+              <a:rPr lang="en-IN" sz="2300" dirty="0">
+                <a:latin typeface="Times New Roman" panose="02020603050405020304" pitchFamily="18" charset="0"/>
+                <a:cs typeface="Times New Roman" panose="02020603050405020304" pitchFamily="18" charset="0"/>
+              </a:rPr>
+              <a:t>Logistic Regression model predicts authenticity</a:t>
+            </a:r>
+          </a:p>
+          <a:p>
+            <a:pPr marL="0" indent="0" algn="ctr">
+              <a:spcAft>
+                <a:spcPts val="500"/>
+              </a:spcAft>
+              <a:buNone/>
+              <a:defRPr sz="2000"/>
+            </a:pPr>
+            <a:endParaRPr lang="en-IN" sz="2300" dirty="0">
+              <a:latin typeface="Times New Roman" panose="02020603050405020304" pitchFamily="18" charset="0"/>
+              <a:cs typeface="Times New Roman" panose="02020603050405020304" pitchFamily="18" charset="0"/>
+            </a:endParaRPr>
+          </a:p>
+          <a:p>
+            <a:pPr marL="0" indent="0" algn="ctr">
+              <a:spcAft>
+                <a:spcPts val="500"/>
+              </a:spcAft>
+              <a:buNone/>
+              <a:defRPr sz="2000"/>
+            </a:pPr>
+            <a:r>
+              <a:rPr lang="en-IN" sz="2300" dirty="0">
+                <a:latin typeface="Times New Roman" panose="02020603050405020304" pitchFamily="18" charset="0"/>
+                <a:cs typeface="Times New Roman" panose="02020603050405020304" pitchFamily="18" charset="0"/>
+              </a:rPr>
+              <a:t>Frontend displays result with confidence levels</a:t>
+            </a:r>
+          </a:p>
+        </p:txBody>
+      </p:sp>
+      <p:sp>
+        <p:nvSpPr>
+          <p:cNvPr id="10" name="Arrow: Down 9">
             <a:extLst>
               <a:ext uri="{FF2B5EF4-FFF2-40B4-BE49-F238E27FC236}">
-                <a16:creationId xmlns:a16="http://schemas.microsoft.com/office/drawing/2014/main" id="{9C76E83E-7DBD-7546-B95B-155EBE4506D0}"/>
+                <a16:creationId xmlns:a16="http://schemas.microsoft.com/office/drawing/2014/main" id="{705F5EF0-10CA-B82E-C62D-1C66A66AEBBD}"/>
               </a:ext>
             </a:extLst>
           </p:cNvPr>
-          <p:cNvSpPr>
-            <a:spLocks noGrp="1"/>
-          </p:cNvSpPr>
-          <p:nvPr>
-            <p:ph type="title"/>
-          </p:nvPr>
-        </p:nvSpPr>
-        <p:spPr/>
-        <p:txBody>
-          <a:bodyPr/>
-          <a:lstStyle/>
-          <a:p>
-            <a:r>
-              <a:rPr lang="en-US" dirty="0">
-                <a:solidFill>
-                  <a:srgbClr val="0000CC"/>
-                </a:solidFill>
-              </a:rPr>
-              <a:t>Test set distribution</a:t>
-            </a:r>
-            <a:endParaRPr lang="en-IN" dirty="0">
-              <a:solidFill>
-                <a:srgbClr val="0000CC"/>
-              </a:solidFill>
-            </a:endParaRPr>
-          </a:p>
-        </p:txBody>
-      </p:sp>
-      <p:pic>
-        <p:nvPicPr>
-          <p:cNvPr id="5" name="Content Placeholder 4" descr="A close-up of a graph&#10;&#10;AI-generated content may be incorrect.">
+          <p:cNvSpPr/>
+          <p:nvPr/>
+        </p:nvSpPr>
+        <p:spPr>
+          <a:xfrm>
+            <a:off x="4311445" y="2146513"/>
+            <a:ext cx="442452" cy="216310"/>
+          </a:xfrm>
+          <a:prstGeom prst="downArrow">
+            <a:avLst/>
+          </a:prstGeom>
+        </p:spPr>
+        <p:style>
+          <a:lnRef idx="1">
+            <a:schemeClr val="accent1"/>
+          </a:lnRef>
+          <a:fillRef idx="3">
+            <a:schemeClr val="accent1"/>
+          </a:fillRef>
+          <a:effectRef idx="2">
+            <a:schemeClr val="accent1"/>
+          </a:effectRef>
+          <a:fontRef idx="minor">
+            <a:schemeClr val="lt1"/>
+          </a:fontRef>
+        </p:style>
+        <p:txBody>
+          <a:bodyPr rtlCol="0" anchor="ctr"/>
+          <a:lstStyle/>
+          <a:p>
+            <a:pPr algn="ctr"/>
+            <a:endParaRPr lang="en-IN" dirty="0"/>
+          </a:p>
+        </p:txBody>
+      </p:sp>
+      <p:sp>
+        <p:nvSpPr>
+          <p:cNvPr id="11" name="Arrow: Down 10">
             <a:extLst>
               <a:ext uri="{FF2B5EF4-FFF2-40B4-BE49-F238E27FC236}">
-                <a16:creationId xmlns:a16="http://schemas.microsoft.com/office/drawing/2014/main" id="{0E4B6DB6-4C9C-61CB-A49B-B26987C9DF0D}"/>
+                <a16:creationId xmlns:a16="http://schemas.microsoft.com/office/drawing/2014/main" id="{1B70830B-C1EB-219C-B081-212C8CB440F8}"/>
               </a:ext>
             </a:extLst>
           </p:cNvPr>
-          <p:cNvPicPr>
-            <a:picLocks noGrp="1" noChangeAspect="1"/>
-          </p:cNvPicPr>
-          <p:nvPr>
-            <p:ph idx="1"/>
-          </p:nvPr>
-        </p:nvPicPr>
-        <p:blipFill>
-          <a:blip r:embed="rId2"/>
-          <a:srcRect l="58605" t="56439" r="3425" b="3837"/>
-          <a:stretch>
-            <a:fillRect/>
-          </a:stretch>
-        </p:blipFill>
+          <p:cNvSpPr/>
+          <p:nvPr/>
+        </p:nvSpPr>
         <p:spPr>
           <a:xfrm>
-            <a:off x="1612392" y="2545080"/>
-            <a:ext cx="5329428" cy="2956560"/>
+            <a:off x="4311445" y="3177716"/>
+            <a:ext cx="442452" cy="216310"/>
           </a:xfrm>
+          <a:prstGeom prst="downArrow">
+            <a:avLst/>
+          </a:prstGeom>
         </p:spPr>
-      </p:pic>
+        <p:style>
+          <a:lnRef idx="1">
+            <a:schemeClr val="accent1"/>
+          </a:lnRef>
+          <a:fillRef idx="3">
+            <a:schemeClr val="accent1"/>
+          </a:fillRef>
+          <a:effectRef idx="2">
+            <a:schemeClr val="accent1"/>
+          </a:effectRef>
+          <a:fontRef idx="minor">
+            <a:schemeClr val="lt1"/>
+          </a:fontRef>
+        </p:style>
+        <p:txBody>
+          <a:bodyPr rtlCol="0" anchor="ctr"/>
+          <a:lstStyle/>
+          <a:p>
+            <a:pPr algn="ctr"/>
+            <a:endParaRPr lang="en-IN" dirty="0"/>
+          </a:p>
+        </p:txBody>
+      </p:sp>
+      <p:sp>
+        <p:nvSpPr>
+          <p:cNvPr id="13" name="Arrow: Down 12">
+            <a:extLst>
+              <a:ext uri="{FF2B5EF4-FFF2-40B4-BE49-F238E27FC236}">
+                <a16:creationId xmlns:a16="http://schemas.microsoft.com/office/drawing/2014/main" id="{60B72F4F-2068-50B6-F00B-D86BD684A16F}"/>
+              </a:ext>
+            </a:extLst>
+          </p:cNvPr>
+          <p:cNvSpPr/>
+          <p:nvPr/>
+        </p:nvSpPr>
+        <p:spPr>
+          <a:xfrm>
+            <a:off x="4291780" y="4987854"/>
+            <a:ext cx="442452" cy="216310"/>
+          </a:xfrm>
+          <a:prstGeom prst="downArrow">
+            <a:avLst/>
+          </a:prstGeom>
+        </p:spPr>
+        <p:style>
+          <a:lnRef idx="1">
+            <a:schemeClr val="accent1"/>
+          </a:lnRef>
+          <a:fillRef idx="3">
+            <a:schemeClr val="accent1"/>
+          </a:fillRef>
+          <a:effectRef idx="2">
+            <a:schemeClr val="accent1"/>
+          </a:effectRef>
+          <a:fontRef idx="minor">
+            <a:schemeClr val="lt1"/>
+          </a:fontRef>
+        </p:style>
+        <p:txBody>
+          <a:bodyPr rtlCol="0" anchor="ctr"/>
+          <a:lstStyle/>
+          <a:p>
+            <a:pPr algn="ctr"/>
+            <a:endParaRPr lang="en-IN" dirty="0"/>
+          </a:p>
+        </p:txBody>
+      </p:sp>
+      <p:sp>
+        <p:nvSpPr>
+          <p:cNvPr id="14" name="Arrow: Down 13">
+            <a:extLst>
+              <a:ext uri="{FF2B5EF4-FFF2-40B4-BE49-F238E27FC236}">
+                <a16:creationId xmlns:a16="http://schemas.microsoft.com/office/drawing/2014/main" id="{EE862FF5-8828-5415-ED6E-30CF249E605D}"/>
+              </a:ext>
+            </a:extLst>
+          </p:cNvPr>
+          <p:cNvSpPr/>
+          <p:nvPr/>
+        </p:nvSpPr>
+        <p:spPr>
+          <a:xfrm>
+            <a:off x="4311445" y="4092729"/>
+            <a:ext cx="442452" cy="216310"/>
+          </a:xfrm>
+          <a:prstGeom prst="downArrow">
+            <a:avLst/>
+          </a:prstGeom>
+        </p:spPr>
+        <p:style>
+          <a:lnRef idx="1">
+            <a:schemeClr val="accent1"/>
+          </a:lnRef>
+          <a:fillRef idx="3">
+            <a:schemeClr val="accent1"/>
+          </a:fillRef>
+          <a:effectRef idx="2">
+            <a:schemeClr val="accent1"/>
+          </a:effectRef>
+          <a:fontRef idx="minor">
+            <a:schemeClr val="lt1"/>
+          </a:fontRef>
+        </p:style>
+        <p:txBody>
+          <a:bodyPr rtlCol="0" anchor="ctr"/>
+          <a:lstStyle/>
+          <a:p>
+            <a:pPr algn="ctr"/>
+            <a:endParaRPr lang="en-IN" dirty="0"/>
+          </a:p>
+        </p:txBody>
+      </p:sp>
     </p:spTree>
-    <p:extLst>
-      <p:ext uri="{BB962C8B-B14F-4D97-AF65-F5344CB8AC3E}">
-        <p14:creationId xmlns:p14="http://schemas.microsoft.com/office/powerpoint/2010/main" val="767582050"/>
-      </p:ext>
-    </p:extLst>
   </p:cSld>
   <p:clrMapOvr>
     <a:masterClrMapping/>
@@ -4808,8 +4820,7 @@
               </a:defRPr>
             </a:pPr>
             <a:r>
-              <a:rPr dirty="0"/>
-              <a:t>Model Results &amp; Performance</a:t>
+              <a:t>Technologies Used</a:t>
             </a:r>
           </a:p>
         </p:txBody>
@@ -4824,7 +4835,12 @@
             <p:ph idx="1"/>
           </p:nvPr>
         </p:nvSpPr>
-        <p:spPr/>
+        <p:spPr>
+          <a:xfrm>
+            <a:off x="607142" y="2807208"/>
+            <a:ext cx="7772400" cy="4050792"/>
+          </a:xfrm>
+        </p:spPr>
         <p:txBody>
           <a:bodyPr/>
           <a:lstStyle/>
@@ -4832,79 +4848,55 @@
             <a:endParaRPr dirty="0"/>
           </a:p>
           <a:p>
-            <a:pPr marL="1671400" lvl="6" indent="0">
+            <a:pPr>
               <a:spcAft>
                 <a:spcPts val="500"/>
               </a:spcAft>
-              <a:buNone/>
               <a:defRPr sz="2000"/>
             </a:pPr>
-            <a:endParaRPr dirty="0"/>
-          </a:p>
-        </p:txBody>
-      </p:sp>
-      <p:pic>
-        <p:nvPicPr>
-          <p:cNvPr id="5" name="Picture 4" descr="A group of graphs and charts&#10;&#10;AI-generated content may be incorrect.">
-            <a:extLst>
-              <a:ext uri="{FF2B5EF4-FFF2-40B4-BE49-F238E27FC236}">
-                <a16:creationId xmlns:a16="http://schemas.microsoft.com/office/drawing/2014/main" id="{29C6EE1C-F9A8-15E7-D336-75C88C81A4F0}"/>
-              </a:ext>
-            </a:extLst>
-          </p:cNvPr>
-          <p:cNvPicPr>
-            <a:picLocks noChangeAspect="1"/>
-          </p:cNvPicPr>
-          <p:nvPr/>
-        </p:nvPicPr>
-        <p:blipFill>
-          <a:blip r:embed="rId2"/>
-          <a:srcRect r="67500" b="48421"/>
-          <a:stretch>
-            <a:fillRect/>
-          </a:stretch>
-        </p:blipFill>
-        <p:spPr>
-          <a:xfrm>
-            <a:off x="281940" y="3167635"/>
-            <a:ext cx="3596640" cy="3192780"/>
-          </a:xfrm>
-          <a:prstGeom prst="rect">
-            <a:avLst/>
-          </a:prstGeom>
-        </p:spPr>
-      </p:pic>
-      <p:pic>
-        <p:nvPicPr>
-          <p:cNvPr id="7" name="Picture 6" descr="A close-up of a graph&#10;&#10;AI-generated content may be incorrect.">
-            <a:extLst>
-              <a:ext uri="{FF2B5EF4-FFF2-40B4-BE49-F238E27FC236}">
-                <a16:creationId xmlns:a16="http://schemas.microsoft.com/office/drawing/2014/main" id="{6106738D-750D-D9EF-BAA0-C2977CC5D911}"/>
-              </a:ext>
-            </a:extLst>
-          </p:cNvPr>
-          <p:cNvPicPr>
-            <a:picLocks noChangeAspect="1"/>
-          </p:cNvPicPr>
-          <p:nvPr/>
-        </p:nvPicPr>
-        <p:blipFill>
-          <a:blip r:embed="rId3"/>
-          <a:srcRect l="47001" t="-48267" r="-1" b="48267"/>
-          <a:stretch>
-            <a:fillRect/>
-          </a:stretch>
-        </p:blipFill>
-        <p:spPr>
-          <a:xfrm>
-            <a:off x="4404360" y="401575"/>
-            <a:ext cx="4579620" cy="5958840"/>
-          </a:xfrm>
-          <a:prstGeom prst="rect">
-            <a:avLst/>
-          </a:prstGeom>
-        </p:spPr>
-      </p:pic>
+            <a:r>
+              <a:rPr sz="2500" dirty="0"/>
+              <a:t>🔹 Backend: Python, Flask, Pandas, Scikit-learn</a:t>
+            </a:r>
+          </a:p>
+          <a:p>
+            <a:pPr>
+              <a:spcAft>
+                <a:spcPts val="500"/>
+              </a:spcAft>
+              <a:defRPr sz="2000"/>
+            </a:pPr>
+            <a:r>
+              <a:rPr sz="2500" dirty="0"/>
+              <a:t>🔹 Frontend: React.js, Tailwind CSS, Babel</a:t>
+            </a:r>
+          </a:p>
+          <a:p>
+            <a:pPr>
+              <a:spcAft>
+                <a:spcPts val="500"/>
+              </a:spcAft>
+              <a:defRPr sz="2000"/>
+            </a:pPr>
+            <a:r>
+              <a:rPr sz="2500" dirty="0"/>
+              <a:t>🔹 Model Storage: Pickle</a:t>
+            </a:r>
+          </a:p>
+          <a:p>
+            <a:pPr>
+              <a:spcAft>
+                <a:spcPts val="500"/>
+              </a:spcAft>
+              <a:defRPr sz="2000"/>
+            </a:pPr>
+            <a:r>
+              <a:rPr sz="2500" dirty="0"/>
+              <a:t>🔹 Communication: RESTful APIs with JSON</a:t>
+            </a:r>
+          </a:p>
+        </p:txBody>
+      </p:sp>
     </p:spTree>
   </p:cSld>
   <p:clrMapOvr>
@@ -4930,12 +4922,49 @@
           <a:chExt cx="0" cy="0"/>
         </a:xfrm>
       </p:grpSpPr>
+      <p:sp>
+        <p:nvSpPr>
+          <p:cNvPr id="2" name="Title 1">
+            <a:extLst>
+              <a:ext uri="{FF2B5EF4-FFF2-40B4-BE49-F238E27FC236}">
+                <a16:creationId xmlns:a16="http://schemas.microsoft.com/office/drawing/2014/main" id="{9C76E83E-7DBD-7546-B95B-155EBE4506D0}"/>
+              </a:ext>
+            </a:extLst>
+          </p:cNvPr>
+          <p:cNvSpPr>
+            <a:spLocks noGrp="1"/>
+          </p:cNvSpPr>
+          <p:nvPr>
+            <p:ph type="title"/>
+          </p:nvPr>
+        </p:nvSpPr>
+        <p:spPr/>
+        <p:txBody>
+          <a:bodyPr/>
+          <a:lstStyle/>
+          <a:p>
+            <a:r>
+              <a:rPr lang="en-US" dirty="0">
+                <a:solidFill>
+                  <a:srgbClr val="0000CC"/>
+                </a:solidFill>
+              </a:rPr>
+              <a:t>Test set distribution</a:t>
+            </a:r>
+            <a:endParaRPr lang="en-IN" dirty="0">
+              <a:solidFill>
+                <a:srgbClr val="0000CC"/>
+              </a:solidFill>
+            </a:endParaRPr>
+          </a:p>
+        </p:txBody>
+      </p:sp>
       <p:pic>
         <p:nvPicPr>
-          <p:cNvPr id="5" name="Content Placeholder 4" descr="A group of graphs and charts&#10;&#10;AI-generated content may be incorrect.">
+          <p:cNvPr id="5" name="Content Placeholder 4" descr="A close-up of a graph&#10;&#10;AI-generated content may be incorrect.">
             <a:extLst>
               <a:ext uri="{FF2B5EF4-FFF2-40B4-BE49-F238E27FC236}">
-                <a16:creationId xmlns:a16="http://schemas.microsoft.com/office/drawing/2014/main" id="{F5413C6C-EBF8-DB76-D251-F451D62606E2}"/>
+                <a16:creationId xmlns:a16="http://schemas.microsoft.com/office/drawing/2014/main" id="{0E4B6DB6-4C9C-61CB-A49B-B26987C9DF0D}"/>
               </a:ext>
             </a:extLst>
           </p:cNvPr>
@@ -4948,22 +4977,22 @@
         </p:nvPicPr>
         <p:blipFill>
           <a:blip r:embed="rId2"/>
-          <a:srcRect t="50567" r="63333"/>
+          <a:srcRect l="58605" t="56439" r="3425" b="3837"/>
           <a:stretch>
             <a:fillRect/>
           </a:stretch>
         </p:blipFill>
         <p:spPr>
           <a:xfrm>
-            <a:off x="865239" y="284151"/>
-            <a:ext cx="7400249" cy="5025267"/>
+            <a:off x="1907286" y="2550489"/>
+            <a:ext cx="5329428" cy="2956560"/>
           </a:xfrm>
         </p:spPr>
       </p:pic>
     </p:spTree>
     <p:extLst>
       <p:ext uri="{BB962C8B-B14F-4D97-AF65-F5344CB8AC3E}">
-        <p14:creationId xmlns:p14="http://schemas.microsoft.com/office/powerpoint/2010/main" val="2442829924"/>
+        <p14:creationId xmlns:p14="http://schemas.microsoft.com/office/powerpoint/2010/main" val="767582050"/>
       </p:ext>
     </p:extLst>
   </p:cSld>
@@ -4974,6 +5003,269 @@
 </file>
 
 <file path=ppt/slides/slide15.xml><?xml version="1.0" encoding="utf-8"?>
+<p:sld xmlns:a="http://schemas.openxmlformats.org/drawingml/2006/main" xmlns:r="http://schemas.openxmlformats.org/officeDocument/2006/relationships" xmlns:p="http://schemas.openxmlformats.org/presentationml/2006/main">
+  <p:cSld>
+    <p:spTree>
+      <p:nvGrpSpPr>
+        <p:cNvPr id="1" name=""/>
+        <p:cNvGrpSpPr/>
+        <p:nvPr/>
+      </p:nvGrpSpPr>
+      <p:grpSpPr>
+        <a:xfrm>
+          <a:off x="0" y="0"/>
+          <a:ext cx="0" cy="0"/>
+          <a:chOff x="0" y="0"/>
+          <a:chExt cx="0" cy="0"/>
+        </a:xfrm>
+      </p:grpSpPr>
+      <p:sp>
+        <p:nvSpPr>
+          <p:cNvPr id="2" name="Title 1"/>
+          <p:cNvSpPr>
+            <a:spLocks noGrp="1"/>
+          </p:cNvSpPr>
+          <p:nvPr>
+            <p:ph type="title"/>
+          </p:nvPr>
+        </p:nvSpPr>
+        <p:spPr>
+          <a:xfrm>
+            <a:off x="160020" y="0"/>
+            <a:ext cx="7772400" cy="890016"/>
+          </a:xfrm>
+        </p:spPr>
+        <p:txBody>
+          <a:bodyPr/>
+          <a:lstStyle/>
+          <a:p>
+            <a:pPr>
+              <a:defRPr sz="3600" b="1">
+                <a:solidFill>
+                  <a:srgbClr val="003399"/>
+                </a:solidFill>
+              </a:defRPr>
+            </a:pPr>
+            <a:r>
+              <a:rPr dirty="0"/>
+              <a:t>Model Results &amp; Performance</a:t>
+            </a:r>
+          </a:p>
+        </p:txBody>
+      </p:sp>
+      <p:pic>
+        <p:nvPicPr>
+          <p:cNvPr id="5" name="Picture 4" descr="A group of graphs and charts&#10;&#10;AI-generated content may be incorrect.">
+            <a:extLst>
+              <a:ext uri="{FF2B5EF4-FFF2-40B4-BE49-F238E27FC236}">
+                <a16:creationId xmlns:a16="http://schemas.microsoft.com/office/drawing/2014/main" id="{29C6EE1C-F9A8-15E7-D336-75C88C81A4F0}"/>
+              </a:ext>
+            </a:extLst>
+          </p:cNvPr>
+          <p:cNvPicPr>
+            <a:picLocks noChangeAspect="1"/>
+          </p:cNvPicPr>
+          <p:nvPr/>
+        </p:nvPicPr>
+        <p:blipFill>
+          <a:blip r:embed="rId2"/>
+          <a:srcRect r="67500" b="48421"/>
+          <a:stretch>
+            <a:fillRect/>
+          </a:stretch>
+        </p:blipFill>
+        <p:spPr>
+          <a:xfrm>
+            <a:off x="2042159" y="685800"/>
+            <a:ext cx="5273041" cy="3748548"/>
+          </a:xfrm>
+          <a:prstGeom prst="rect">
+            <a:avLst/>
+          </a:prstGeom>
+        </p:spPr>
+      </p:pic>
+      <p:sp>
+        <p:nvSpPr>
+          <p:cNvPr id="4" name="TextBox 3">
+            <a:extLst>
+              <a:ext uri="{FF2B5EF4-FFF2-40B4-BE49-F238E27FC236}">
+                <a16:creationId xmlns:a16="http://schemas.microsoft.com/office/drawing/2014/main" id="{E543171C-191F-03DC-244D-B2C8DE4DA763}"/>
+              </a:ext>
+            </a:extLst>
+          </p:cNvPr>
+          <p:cNvSpPr txBox="1"/>
+          <p:nvPr/>
+        </p:nvSpPr>
+        <p:spPr>
+          <a:xfrm>
+            <a:off x="137652" y="4580849"/>
+            <a:ext cx="8191008" cy="646331"/>
+          </a:xfrm>
+          <a:prstGeom prst="rect">
+            <a:avLst/>
+          </a:prstGeom>
+          <a:noFill/>
+        </p:spPr>
+        <p:txBody>
+          <a:bodyPr wrap="square" rtlCol="0">
+            <a:spAutoFit/>
+          </a:bodyPr>
+          <a:lstStyle/>
+          <a:p>
+            <a:r>
+              <a:rPr lang="en-US" dirty="0">
+                <a:sym typeface="Wingdings" panose="05000000000000000000" pitchFamily="2" charset="2"/>
+              </a:rPr>
+              <a:t>The model showed a very low rate of false positives and false negatives, as showcased by the confusion matrix given above</a:t>
+            </a:r>
+            <a:endParaRPr lang="en-IN" dirty="0"/>
+          </a:p>
+        </p:txBody>
+      </p:sp>
+    </p:spTree>
+  </p:cSld>
+  <p:clrMapOvr>
+    <a:masterClrMapping/>
+  </p:clrMapOvr>
+</p:sld>
+</file>
+
+<file path=ppt/slides/slide16.xml><?xml version="1.0" encoding="utf-8"?>
+<p:sld xmlns:a="http://schemas.openxmlformats.org/drawingml/2006/main" xmlns:r="http://schemas.openxmlformats.org/officeDocument/2006/relationships" xmlns:p="http://schemas.openxmlformats.org/presentationml/2006/main">
+  <p:cSld>
+    <p:spTree>
+      <p:nvGrpSpPr>
+        <p:cNvPr id="1" name=""/>
+        <p:cNvGrpSpPr/>
+        <p:nvPr/>
+      </p:nvGrpSpPr>
+      <p:grpSpPr>
+        <a:xfrm>
+          <a:off x="0" y="0"/>
+          <a:ext cx="0" cy="0"/>
+          <a:chOff x="0" y="0"/>
+          <a:chExt cx="0" cy="0"/>
+        </a:xfrm>
+      </p:grpSpPr>
+      <p:pic>
+        <p:nvPicPr>
+          <p:cNvPr id="8" name="Picture 7">
+            <a:extLst>
+              <a:ext uri="{FF2B5EF4-FFF2-40B4-BE49-F238E27FC236}">
+                <a16:creationId xmlns:a16="http://schemas.microsoft.com/office/drawing/2014/main" id="{F232DA8E-DE5D-D983-1D35-2AB93CAEBA5A}"/>
+              </a:ext>
+            </a:extLst>
+          </p:cNvPr>
+          <p:cNvPicPr>
+            <a:picLocks noChangeAspect="1"/>
+          </p:cNvPicPr>
+          <p:nvPr/>
+        </p:nvPicPr>
+        <p:blipFill>
+          <a:blip r:embed="rId2"/>
+          <a:stretch>
+            <a:fillRect/>
+          </a:stretch>
+        </p:blipFill>
+        <p:spPr>
+          <a:xfrm>
+            <a:off x="271967" y="233681"/>
+            <a:ext cx="8872033" cy="3444239"/>
+          </a:xfrm>
+          <a:prstGeom prst="rect">
+            <a:avLst/>
+          </a:prstGeom>
+        </p:spPr>
+      </p:pic>
+      <p:sp>
+        <p:nvSpPr>
+          <p:cNvPr id="10" name="TextBox 9">
+            <a:extLst>
+              <a:ext uri="{FF2B5EF4-FFF2-40B4-BE49-F238E27FC236}">
+                <a16:creationId xmlns:a16="http://schemas.microsoft.com/office/drawing/2014/main" id="{B909A1C4-2781-E4B7-30A2-D7E72BD4D94B}"/>
+              </a:ext>
+            </a:extLst>
+          </p:cNvPr>
+          <p:cNvSpPr txBox="1"/>
+          <p:nvPr/>
+        </p:nvSpPr>
+        <p:spPr>
+          <a:xfrm>
+            <a:off x="619760" y="3800168"/>
+            <a:ext cx="7904480" cy="2862322"/>
+          </a:xfrm>
+          <a:prstGeom prst="rect">
+            <a:avLst/>
+          </a:prstGeom>
+          <a:noFill/>
+        </p:spPr>
+        <p:txBody>
+          <a:bodyPr wrap="square" rtlCol="0">
+            <a:spAutoFit/>
+          </a:bodyPr>
+          <a:lstStyle/>
+          <a:p>
+            <a:r>
+              <a:rPr lang="en-US" dirty="0">
+                <a:sym typeface="Wingdings" panose="05000000000000000000" pitchFamily="2" charset="2"/>
+              </a:rPr>
+              <a:t>Accuracy: It is measuring the percentage of total correct predictions</a:t>
+            </a:r>
+          </a:p>
+          <a:p>
+            <a:r>
+              <a:rPr lang="en-US" dirty="0">
+                <a:sym typeface="Wingdings" panose="05000000000000000000" pitchFamily="2" charset="2"/>
+              </a:rPr>
+              <a:t>Precision: It showcases how many fake articles were correctly predicted as fake by the model, tells us how often false positives occur</a:t>
+            </a:r>
+          </a:p>
+          <a:p>
+            <a:r>
+              <a:rPr lang="en-US" dirty="0">
+                <a:sym typeface="Wingdings" panose="05000000000000000000" pitchFamily="2" charset="2"/>
+              </a:rPr>
+              <a:t>Recall: It shows how many actual fake articles were detected successfully, tells us how often false negatives occur</a:t>
+            </a:r>
+          </a:p>
+          <a:p>
+            <a:r>
+              <a:rPr lang="en-US" dirty="0">
+                <a:sym typeface="Wingdings" panose="05000000000000000000" pitchFamily="2" charset="2"/>
+              </a:rPr>
+              <a:t>F1 score: it is the harmonic mean of precision and recall, gives a overall metric to how often the model makes a mistake</a:t>
+            </a:r>
+          </a:p>
+          <a:p>
+            <a:endParaRPr lang="en-US" dirty="0">
+              <a:sym typeface="Wingdings" panose="05000000000000000000" pitchFamily="2" charset="2"/>
+            </a:endParaRPr>
+          </a:p>
+          <a:p>
+            <a:r>
+              <a:rPr lang="en-US" dirty="0">
+                <a:sym typeface="Wingdings" panose="05000000000000000000" pitchFamily="2" charset="2"/>
+              </a:rPr>
+              <a:t>In this model, we see all the metrics are above 95%, so it can be trusted to make the right predictions, though mistakes are still possible</a:t>
+            </a:r>
+            <a:endParaRPr lang="en-IN" dirty="0"/>
+          </a:p>
+        </p:txBody>
+      </p:sp>
+    </p:spTree>
+    <p:extLst>
+      <p:ext uri="{BB962C8B-B14F-4D97-AF65-F5344CB8AC3E}">
+        <p14:creationId xmlns:p14="http://schemas.microsoft.com/office/powerpoint/2010/main" val="3990401903"/>
+      </p:ext>
+    </p:extLst>
+  </p:cSld>
+  <p:clrMapOvr>
+    <a:masterClrMapping/>
+  </p:clrMapOvr>
+</p:sld>
+</file>
+
+<file path=ppt/slides/slide17.xml><?xml version="1.0" encoding="utf-8"?>
 <p:sld xmlns:a="http://schemas.openxmlformats.org/drawingml/2006/main" xmlns:r="http://schemas.openxmlformats.org/officeDocument/2006/relationships" xmlns:p="http://schemas.openxmlformats.org/presentationml/2006/main">
   <p:cSld>
     <p:spTree>
@@ -5628,7 +5920,12 @@
             <p:ph type="title"/>
           </p:nvPr>
         </p:nvSpPr>
-        <p:spPr/>
+        <p:spPr>
+          <a:xfrm>
+            <a:off x="685800" y="491612"/>
+            <a:ext cx="7772400" cy="668299"/>
+          </a:xfrm>
+        </p:spPr>
         <p:txBody>
           <a:bodyPr/>
           <a:lstStyle/>
@@ -5667,20 +5964,71 @@
         </p:nvPicPr>
         <p:blipFill>
           <a:blip r:embed="rId2"/>
+          <a:srcRect b="57248"/>
           <a:stretch>
             <a:fillRect/>
           </a:stretch>
         </p:blipFill>
         <p:spPr>
           <a:xfrm>
-            <a:off x="1112341" y="1653540"/>
-            <a:ext cx="7010579" cy="4152900"/>
+            <a:off x="685800" y="1425677"/>
+            <a:ext cx="7878097" cy="2003323"/>
           </a:xfrm>
           <a:prstGeom prst="rect">
             <a:avLst/>
           </a:prstGeom>
         </p:spPr>
       </p:pic>
+      <p:sp>
+        <p:nvSpPr>
+          <p:cNvPr id="3" name="TextBox 2">
+            <a:extLst>
+              <a:ext uri="{FF2B5EF4-FFF2-40B4-BE49-F238E27FC236}">
+                <a16:creationId xmlns:a16="http://schemas.microsoft.com/office/drawing/2014/main" id="{5FAC26FD-2A0A-2EBD-43F4-B91E999E9B43}"/>
+              </a:ext>
+            </a:extLst>
+          </p:cNvPr>
+          <p:cNvSpPr txBox="1"/>
+          <p:nvPr/>
+        </p:nvSpPr>
+        <p:spPr>
+          <a:xfrm>
+            <a:off x="685800" y="3824748"/>
+            <a:ext cx="7415981" cy="1754326"/>
+          </a:xfrm>
+          <a:prstGeom prst="rect">
+            <a:avLst/>
+          </a:prstGeom>
+          <a:noFill/>
+        </p:spPr>
+        <p:txBody>
+          <a:bodyPr wrap="square" rtlCol="0">
+            <a:spAutoFit/>
+          </a:bodyPr>
+          <a:lstStyle/>
+          <a:p>
+            <a:r>
+              <a:rPr lang="en-US" dirty="0"/>
+              <a:t>This graph shows us that:</a:t>
+            </a:r>
+          </a:p>
+          <a:p>
+            <a:r>
+              <a:rPr lang="en-US" dirty="0"/>
+              <a:t>&gt;Fake news articles have a larger range of words from 200-1000 words, while Real news articles have a smaller range of 200-600 words, likely due to a lot more filler content in fake news articles</a:t>
+            </a:r>
+          </a:p>
+          <a:p>
+            <a:r>
+              <a:rPr lang="en-US" dirty="0"/>
+              <a:t>&gt;Very large articles(1300-2000 words) are almost always fake</a:t>
+            </a:r>
+          </a:p>
+          <a:p>
+            <a:endParaRPr lang="en-IN" dirty="0"/>
+          </a:p>
+        </p:txBody>
+      </p:sp>
     </p:spTree>
     <p:extLst>
       <p:ext uri="{BB962C8B-B14F-4D97-AF65-F5344CB8AC3E}">
@@ -5711,121 +6059,93 @@
           <a:chExt cx="0" cy="0"/>
         </a:xfrm>
       </p:grpSpPr>
-      <p:sp>
-        <p:nvSpPr>
-          <p:cNvPr id="2" name="Title 1"/>
-          <p:cNvSpPr>
-            <a:spLocks noGrp="1"/>
-          </p:cNvSpPr>
-          <p:nvPr>
-            <p:ph type="title"/>
-          </p:nvPr>
-        </p:nvSpPr>
-        <p:spPr/>
-        <p:txBody>
-          <a:bodyPr/>
-          <a:lstStyle/>
-          <a:p>
-            <a:pPr>
-              <a:defRPr sz="3600" b="1">
-                <a:solidFill>
-                  <a:srgbClr val="003399"/>
-                </a:solidFill>
-              </a:defRPr>
-            </a:pPr>
-            <a:r>
-              <a:rPr dirty="0"/>
-              <a:t>Backend (Flask Application)</a:t>
-            </a:r>
-          </a:p>
-        </p:txBody>
-      </p:sp>
-      <p:sp>
-        <p:nvSpPr>
-          <p:cNvPr id="3" name="Content Placeholder 2"/>
-          <p:cNvSpPr>
-            <a:spLocks noGrp="1"/>
-          </p:cNvSpPr>
+      <p:pic>
+        <p:nvPicPr>
+          <p:cNvPr id="4" name="Content Placeholder 3">
+            <a:extLst>
+              <a:ext uri="{FF2B5EF4-FFF2-40B4-BE49-F238E27FC236}">
+                <a16:creationId xmlns:a16="http://schemas.microsoft.com/office/drawing/2014/main" id="{0A950A5C-AF08-6815-2D07-6C3823D5ADA2}"/>
+              </a:ext>
+            </a:extLst>
+          </p:cNvPr>
+          <p:cNvPicPr>
+            <a:picLocks noGrp="1" noChangeAspect="1"/>
+          </p:cNvPicPr>
           <p:nvPr>
             <p:ph idx="1"/>
           </p:nvPr>
-        </p:nvSpPr>
-        <p:spPr/>
-        <p:txBody>
-          <a:bodyPr/>
-          <a:lstStyle/>
-          <a:p>
-            <a:endParaRPr/>
-          </a:p>
-          <a:p>
-            <a:pPr>
-              <a:spcAft>
-                <a:spcPts val="500"/>
-              </a:spcAft>
-              <a:defRPr sz="2000"/>
-            </a:pPr>
-            <a:r>
-              <a:t>• Flask REST API for model training and predictions</a:t>
-            </a:r>
-          </a:p>
-          <a:p>
-            <a:pPr>
-              <a:spcAft>
-                <a:spcPts val="500"/>
-              </a:spcAft>
-              <a:defRPr sz="2000"/>
-            </a:pPr>
-            <a:r>
-              <a:t>• Endpoints:</a:t>
-            </a:r>
-          </a:p>
-          <a:p>
-            <a:pPr>
-              <a:spcAft>
-                <a:spcPts val="500"/>
-              </a:spcAft>
-              <a:defRPr sz="2000"/>
-            </a:pPr>
-            <a:r>
-              <a:t>   - /api/predict → Predict fake or real news</a:t>
-            </a:r>
-          </a:p>
-          <a:p>
-            <a:pPr>
-              <a:spcAft>
-                <a:spcPts val="500"/>
-              </a:spcAft>
-              <a:defRPr sz="2000"/>
-            </a:pPr>
-            <a:r>
-              <a:t>   - /api/stats → Retrieve model performance metrics</a:t>
-            </a:r>
-          </a:p>
-          <a:p>
-            <a:pPr>
-              <a:spcAft>
-                <a:spcPts val="500"/>
-              </a:spcAft>
-              <a:defRPr sz="2000"/>
-            </a:pPr>
-            <a:r>
-              <a:t>   - /api/retrain → Retrain model with updated datasets</a:t>
-            </a:r>
-          </a:p>
-          <a:p>
-            <a:pPr>
-              <a:spcAft>
-                <a:spcPts val="500"/>
-              </a:spcAft>
-              <a:defRPr sz="2000"/>
-            </a:pPr>
-            <a:r>
-              <a:t>• Saves trained model and TF-IDF vectorizer using Pickle</a:t>
-            </a:r>
+        </p:nvPicPr>
+        <p:blipFill>
+          <a:blip r:embed="rId2"/>
+          <a:srcRect t="49693"/>
+          <a:stretch>
+            <a:fillRect/>
+          </a:stretch>
+        </p:blipFill>
+        <p:spPr>
+          <a:xfrm>
+            <a:off x="168444" y="462116"/>
+            <a:ext cx="7471221" cy="2966884"/>
+          </a:xfrm>
+          <a:prstGeom prst="rect">
+            <a:avLst/>
+          </a:prstGeom>
+        </p:spPr>
+      </p:pic>
+      <p:sp>
+        <p:nvSpPr>
+          <p:cNvPr id="5" name="TextBox 4">
+            <a:extLst>
+              <a:ext uri="{FF2B5EF4-FFF2-40B4-BE49-F238E27FC236}">
+                <a16:creationId xmlns:a16="http://schemas.microsoft.com/office/drawing/2014/main" id="{BAA9F605-3762-E4EC-B870-5C449C144589}"/>
+              </a:ext>
+            </a:extLst>
+          </p:cNvPr>
+          <p:cNvSpPr txBox="1"/>
+          <p:nvPr/>
+        </p:nvSpPr>
+        <p:spPr>
+          <a:xfrm>
+            <a:off x="168444" y="4218039"/>
+            <a:ext cx="7964129" cy="1477328"/>
+          </a:xfrm>
+          <a:prstGeom prst="rect">
+            <a:avLst/>
+          </a:prstGeom>
+          <a:noFill/>
+        </p:spPr>
+        <p:txBody>
+          <a:bodyPr wrap="square" rtlCol="0">
+            <a:spAutoFit/>
+          </a:bodyPr>
+          <a:lstStyle/>
+          <a:p>
+            <a:r>
+              <a:rPr lang="en-US" dirty="0"/>
+              <a:t>This graph shows us:</a:t>
+            </a:r>
+          </a:p>
+          <a:p>
+            <a:r>
+              <a:rPr lang="en-US" dirty="0"/>
+              <a:t>&gt;Fake news articles use a lot more exclamation marks in comparison to real news articles</a:t>
+            </a:r>
+          </a:p>
+          <a:p>
+            <a:r>
+              <a:rPr lang="en-US" dirty="0"/>
+              <a:t>&gt;Real news articles use barely any exclamation marks, as they adhere to professional journalistic standards</a:t>
+            </a:r>
+            <a:endParaRPr lang="en-IN" dirty="0"/>
           </a:p>
         </p:txBody>
       </p:sp>
     </p:spTree>
+    <p:extLst>
+      <p:ext uri="{BB962C8B-B14F-4D97-AF65-F5344CB8AC3E}">
+        <p14:creationId xmlns:p14="http://schemas.microsoft.com/office/powerpoint/2010/main" val="1000966136"/>
+      </p:ext>
+    </p:extLst>
   </p:cSld>
   <p:clrMapOvr>
     <a:masterClrMapping/>
@@ -5850,98 +6170,115 @@
           <a:chExt cx="0" cy="0"/>
         </a:xfrm>
       </p:grpSpPr>
-      <p:sp>
-        <p:nvSpPr>
-          <p:cNvPr id="2" name="Title 1"/>
-          <p:cNvSpPr>
-            <a:spLocks noGrp="1"/>
-          </p:cNvSpPr>
-          <p:nvPr>
-            <p:ph type="title"/>
-          </p:nvPr>
-        </p:nvSpPr>
-        <p:spPr/>
-        <p:txBody>
-          <a:bodyPr/>
-          <a:lstStyle/>
-          <a:p>
-            <a:pPr>
-              <a:defRPr sz="3600" b="1">
-                <a:solidFill>
-                  <a:srgbClr val="003399"/>
-                </a:solidFill>
-              </a:defRPr>
-            </a:pPr>
-            <a:r>
-              <a:t>Machine Learning Model</a:t>
-            </a:r>
-          </a:p>
-        </p:txBody>
-      </p:sp>
-      <p:sp>
-        <p:nvSpPr>
-          <p:cNvPr id="3" name="Content Placeholder 2"/>
-          <p:cNvSpPr>
-            <a:spLocks noGrp="1"/>
-          </p:cNvSpPr>
-          <p:nvPr>
-            <p:ph idx="1"/>
-          </p:nvPr>
-        </p:nvSpPr>
-        <p:spPr/>
-        <p:txBody>
-          <a:bodyPr/>
-          <a:lstStyle/>
-          <a:p>
-            <a:endParaRPr/>
-          </a:p>
-          <a:p>
-            <a:pPr>
-              <a:spcAft>
-                <a:spcPts val="500"/>
-              </a:spcAft>
-              <a:defRPr sz="2000"/>
-            </a:pPr>
-            <a:r>
-              <a:t>• Text preprocessing includes cleaning URLs, punctuation, and hashtags</a:t>
-            </a:r>
-          </a:p>
-          <a:p>
-            <a:pPr>
-              <a:spcAft>
-                <a:spcPts val="500"/>
-              </a:spcAft>
-              <a:defRPr sz="2000"/>
-            </a:pPr>
-            <a:r>
-              <a:t>• TF-IDF Vectorizer extracts features from text</a:t>
-            </a:r>
-          </a:p>
-          <a:p>
-            <a:pPr>
-              <a:spcAft>
-                <a:spcPts val="500"/>
-              </a:spcAft>
-              <a:defRPr sz="2000"/>
-            </a:pPr>
-            <a:r>
-              <a:t>• Logistic Regression classifier predicts fake vs. real</a:t>
-            </a:r>
-          </a:p>
-          <a:p>
-            <a:pPr>
-              <a:spcAft>
-                <a:spcPts val="500"/>
-              </a:spcAft>
-              <a:defRPr sz="2000"/>
-            </a:pPr>
-            <a:r>
-              <a:t>• Model evaluated on Accuracy, Precision, Recall, and F1-score</a:t>
-            </a:r>
+      <p:pic>
+        <p:nvPicPr>
+          <p:cNvPr id="5" name="Picture 4" descr="A group of graphs and charts&#10;&#10;AI-generated content may be incorrect.">
+            <a:extLst>
+              <a:ext uri="{FF2B5EF4-FFF2-40B4-BE49-F238E27FC236}">
+                <a16:creationId xmlns:a16="http://schemas.microsoft.com/office/drawing/2014/main" id="{C67C29DF-AFAE-3C85-F045-9DF7BF6AD7B3}"/>
+              </a:ext>
+            </a:extLst>
+          </p:cNvPr>
+          <p:cNvPicPr>
+            <a:picLocks noChangeAspect="1"/>
+          </p:cNvPicPr>
+          <p:nvPr/>
+        </p:nvPicPr>
+        <p:blipFill>
+          <a:blip r:embed="rId2"/>
+          <a:srcRect l="33333" t="56346" b="7291"/>
+          <a:stretch>
+            <a:fillRect/>
+          </a:stretch>
+        </p:blipFill>
+        <p:spPr>
+          <a:xfrm>
+            <a:off x="0" y="117987"/>
+            <a:ext cx="8908026" cy="4414684"/>
+          </a:xfrm>
+          <a:prstGeom prst="rect">
+            <a:avLst/>
+          </a:prstGeom>
+        </p:spPr>
+      </p:pic>
+      <p:sp>
+        <p:nvSpPr>
+          <p:cNvPr id="6" name="TextBox 5">
+            <a:extLst>
+              <a:ext uri="{FF2B5EF4-FFF2-40B4-BE49-F238E27FC236}">
+                <a16:creationId xmlns:a16="http://schemas.microsoft.com/office/drawing/2014/main" id="{800BA4E3-BD70-0E95-93AA-B38FB9104BA8}"/>
+              </a:ext>
+            </a:extLst>
+          </p:cNvPr>
+          <p:cNvSpPr txBox="1"/>
+          <p:nvPr/>
+        </p:nvSpPr>
+        <p:spPr>
+          <a:xfrm>
+            <a:off x="285137" y="5191433"/>
+            <a:ext cx="4208206" cy="923330"/>
+          </a:xfrm>
+          <a:prstGeom prst="rect">
+            <a:avLst/>
+          </a:prstGeom>
+          <a:noFill/>
+        </p:spPr>
+        <p:txBody>
+          <a:bodyPr wrap="square" rtlCol="0">
+            <a:spAutoFit/>
+          </a:bodyPr>
+          <a:lstStyle/>
+          <a:p>
+            <a:r>
+              <a:rPr lang="en-US" dirty="0"/>
+              <a:t>This word cloud shows the most frequent words used in the fake news articles dataset</a:t>
+            </a:r>
+            <a:endParaRPr lang="en-IN" dirty="0"/>
+          </a:p>
+        </p:txBody>
+      </p:sp>
+      <p:sp>
+        <p:nvSpPr>
+          <p:cNvPr id="7" name="TextBox 6">
+            <a:extLst>
+              <a:ext uri="{FF2B5EF4-FFF2-40B4-BE49-F238E27FC236}">
+                <a16:creationId xmlns:a16="http://schemas.microsoft.com/office/drawing/2014/main" id="{C3041B83-1A04-AECA-75B1-EE94962EE306}"/>
+              </a:ext>
+            </a:extLst>
+          </p:cNvPr>
+          <p:cNvSpPr txBox="1"/>
+          <p:nvPr/>
+        </p:nvSpPr>
+        <p:spPr>
+          <a:xfrm>
+            <a:off x="5073446" y="5191433"/>
+            <a:ext cx="3569110" cy="923330"/>
+          </a:xfrm>
+          <a:prstGeom prst="rect">
+            <a:avLst/>
+          </a:prstGeom>
+          <a:noFill/>
+        </p:spPr>
+        <p:txBody>
+          <a:bodyPr wrap="square" rtlCol="0">
+            <a:spAutoFit/>
+          </a:bodyPr>
+          <a:lstStyle/>
+          <a:p>
+            <a:r>
+              <a:rPr lang="en-US" dirty="0"/>
+              <a:t>This word cloud shows the most frequent words used in the real news articles dataset </a:t>
+            </a:r>
+            <a:endParaRPr lang="en-IN" dirty="0"/>
           </a:p>
         </p:txBody>
       </p:sp>
     </p:spTree>
+    <p:extLst>
+      <p:ext uri="{BB962C8B-B14F-4D97-AF65-F5344CB8AC3E}">
+        <p14:creationId xmlns:p14="http://schemas.microsoft.com/office/powerpoint/2010/main" val="3584010264"/>
+      </p:ext>
+    </p:extLst>
   </p:cSld>
   <p:clrMapOvr>
     <a:masterClrMapping/>
@@ -5989,7 +6326,8 @@
               </a:defRPr>
             </a:pPr>
             <a:r>
-              <a:t>Frontend (React Application)</a:t>
+              <a:rPr dirty="0"/>
+              <a:t>Backend (Flask Application)</a:t>
             </a:r>
           </a:p>
         </p:txBody>
@@ -6019,7 +6357,7 @@
               <a:defRPr sz="2000"/>
             </a:pPr>
             <a:r>
-              <a:t>• Developed using React and Tailwind CSS</a:t>
+              <a:t>• Flask REST API for model training and predictions</a:t>
             </a:r>
           </a:p>
           <a:p>
@@ -6030,7 +6368,7 @@
               <a:defRPr sz="2000"/>
             </a:pPr>
             <a:r>
-              <a:t>• Connects to Flask backend for real-time predictions</a:t>
+              <a:t>• Endpoints:</a:t>
             </a:r>
           </a:p>
           <a:p>
@@ -6041,7 +6379,7 @@
               <a:defRPr sz="2000"/>
             </a:pPr>
             <a:r>
-              <a:t>• Displays live model metrics (accuracy, F1-score, etc.)</a:t>
+              <a:t>   - /api/predict → Predict fake or real news</a:t>
             </a:r>
           </a:p>
           <a:p>
@@ -6052,7 +6390,29 @@
               <a:defRPr sz="2000"/>
             </a:pPr>
             <a:r>
-              <a:t>• Interactive design with example news articles and visual confidence bars</a:t>
+              <a:t>   - /api/stats → Retrieve model performance metrics</a:t>
+            </a:r>
+          </a:p>
+          <a:p>
+            <a:pPr>
+              <a:spcAft>
+                <a:spcPts val="500"/>
+              </a:spcAft>
+              <a:defRPr sz="2000"/>
+            </a:pPr>
+            <a:r>
+              <a:t>   - /api/retrain → Retrain model with updated datasets</a:t>
+            </a:r>
+          </a:p>
+          <a:p>
+            <a:pPr>
+              <a:spcAft>
+                <a:spcPts val="500"/>
+              </a:spcAft>
+              <a:defRPr sz="2000"/>
+            </a:pPr>
+            <a:r>
+              <a:t>• Saves trained model and TF-IDF vectorizer using Pickle</a:t>
             </a:r>
           </a:p>
         </p:txBody>

--- a/Fake news detection presentation.pptx
+++ b/Fake news detection presentation.pptx
@@ -15,13 +15,15 @@
     <p:sldId id="276" r:id="rId9"/>
     <p:sldId id="259" r:id="rId10"/>
     <p:sldId id="260" r:id="rId11"/>
-    <p:sldId id="261" r:id="rId12"/>
-    <p:sldId id="262" r:id="rId13"/>
-    <p:sldId id="264" r:id="rId14"/>
-    <p:sldId id="272" r:id="rId15"/>
-    <p:sldId id="265" r:id="rId16"/>
-    <p:sldId id="274" r:id="rId17"/>
-    <p:sldId id="267" r:id="rId18"/>
+    <p:sldId id="277" r:id="rId12"/>
+    <p:sldId id="278" r:id="rId13"/>
+    <p:sldId id="261" r:id="rId14"/>
+    <p:sldId id="262" r:id="rId15"/>
+    <p:sldId id="264" r:id="rId16"/>
+    <p:sldId id="272" r:id="rId17"/>
+    <p:sldId id="265" r:id="rId18"/>
+    <p:sldId id="274" r:id="rId19"/>
+    <p:sldId id="267" r:id="rId20"/>
   </p:sldIdLst>
   <p:sldSz cx="9144000" cy="6858000" type="screen4x3"/>
   <p:notesSz cx="6858000" cy="9144000"/>
@@ -4299,7 +4301,13 @@
       </p:grpSpPr>
       <p:sp>
         <p:nvSpPr>
-          <p:cNvPr id="2" name="Title 1"/>
+          <p:cNvPr id="2" name="Title 1">
+            <a:extLst>
+              <a:ext uri="{FF2B5EF4-FFF2-40B4-BE49-F238E27FC236}">
+                <a16:creationId xmlns:a16="http://schemas.microsoft.com/office/drawing/2014/main" id="{A88C41D9-36D2-A4F3-F698-C12A081C9AF3}"/>
+              </a:ext>
+            </a:extLst>
+          </p:cNvPr>
           <p:cNvSpPr>
             <a:spLocks noGrp="1"/>
           </p:cNvSpPr>
@@ -4307,88 +4315,161 @@
             <p:ph type="title"/>
           </p:nvPr>
         </p:nvSpPr>
-        <p:spPr/>
-        <p:txBody>
-          <a:bodyPr/>
-          <a:lstStyle/>
-          <a:p>
-            <a:pPr>
-              <a:defRPr sz="3600" b="1">
+        <p:spPr>
+          <a:xfrm>
+            <a:off x="194187" y="150089"/>
+            <a:ext cx="7772400" cy="1071421"/>
+          </a:xfrm>
+        </p:spPr>
+        <p:txBody>
+          <a:bodyPr>
+            <a:normAutofit fontScale="90000"/>
+          </a:bodyPr>
+          <a:lstStyle/>
+          <a:p>
+            <a:r>
+              <a:rPr lang="en-US" dirty="0">
                 <a:solidFill>
-                  <a:srgbClr val="003399"/>
+                  <a:srgbClr val="0000CC"/>
                 </a:solidFill>
-              </a:defRPr>
+              </a:rPr>
+              <a:t>WHY USE TF-IDF AND LOGISTIC REGRESSION?</a:t>
+            </a:r>
+            <a:endParaRPr lang="en-IN" dirty="0">
+              <a:solidFill>
+                <a:srgbClr val="0000CC"/>
+              </a:solidFill>
+            </a:endParaRPr>
+          </a:p>
+        </p:txBody>
+      </p:sp>
+      <p:sp>
+        <p:nvSpPr>
+          <p:cNvPr id="3" name="Content Placeholder 2">
+            <a:extLst>
+              <a:ext uri="{FF2B5EF4-FFF2-40B4-BE49-F238E27FC236}">
+                <a16:creationId xmlns:a16="http://schemas.microsoft.com/office/drawing/2014/main" id="{33C48941-F1C8-9876-1219-9895C7CDF226}"/>
+              </a:ext>
+            </a:extLst>
+          </p:cNvPr>
+          <p:cNvSpPr>
+            <a:spLocks noGrp="1"/>
+          </p:cNvSpPr>
+          <p:nvPr>
+            <p:ph idx="1"/>
+          </p:nvPr>
+        </p:nvSpPr>
+        <p:spPr>
+          <a:xfrm>
+            <a:off x="0" y="1061883"/>
+            <a:ext cx="9144000" cy="5646027"/>
+          </a:xfrm>
+        </p:spPr>
+        <p:txBody>
+          <a:bodyPr>
+            <a:normAutofit/>
+          </a:bodyPr>
+          <a:lstStyle/>
+          <a:p>
+            <a:r>
+              <a:rPr lang="en-US" dirty="0"/>
+              <a:t>First some explanations:</a:t>
+            </a:r>
+          </a:p>
+          <a:p>
+            <a:r>
+              <a:rPr lang="en-US" dirty="0"/>
+              <a:t> TF-IDF vectorization:</a:t>
+            </a:r>
+          </a:p>
+          <a:p>
+            <a:pPr lvl="1"/>
+            <a:r>
+              <a:rPr lang="en-US" dirty="0"/>
+              <a:t>It is useful to identify meaningful words, reduce noise(words like: is, the </a:t>
+            </a:r>
+            <a:r>
+              <a:rPr lang="en-US" dirty="0" err="1"/>
+              <a:t>etc</a:t>
+            </a:r>
+            <a:r>
+              <a:rPr lang="en-US" dirty="0"/>
+              <a:t>) and help the model focus on informative words</a:t>
+            </a:r>
+          </a:p>
+          <a:p>
+            <a:pPr lvl="1"/>
+            <a:r>
+              <a:rPr lang="en-US" dirty="0"/>
+              <a:t> TF(Term frequency): it measures how often a word appears in an article, but it alone is not enough, as some other common words(</a:t>
+            </a:r>
+            <a:r>
+              <a:rPr lang="en-US" dirty="0" err="1"/>
+              <a:t>eg</a:t>
+            </a:r>
+            <a:r>
+              <a:rPr lang="en-US" dirty="0"/>
+              <a:t>- news, breaking </a:t>
+            </a:r>
+            <a:r>
+              <a:rPr lang="en-US" dirty="0" err="1"/>
+              <a:t>etc</a:t>
+            </a:r>
+            <a:r>
+              <a:rPr lang="en-US" dirty="0"/>
+              <a:t>) appear quite frequently</a:t>
+            </a:r>
+          </a:p>
+          <a:p>
+            <a:pPr lvl="1"/>
+            <a:r>
+              <a:rPr lang="en-US" dirty="0"/>
+              <a:t>IDF(inverse document frequency):</a:t>
+            </a:r>
+            <a:r>
+              <a:rPr lang="en-IN" dirty="0"/>
+              <a:t> It measures the rarity or uniqueness of a word, across the entire dataset, the formula for it is log(N/n), where N is the total number of documents and n is the number of documents containing the term</a:t>
+            </a:r>
+          </a:p>
+          <a:p>
+            <a:pPr lvl="1"/>
+            <a:r>
+              <a:rPr lang="en-IN" dirty="0"/>
+              <a:t>Combining these two functions tells how important a word is in a specific document, a high TF-IDF score would indicate the word appears frequently in a specific article, but is rare across the dataset, making it very important, while ignoring words with a low score</a:t>
+            </a:r>
+          </a:p>
+          <a:p>
+            <a:pPr lvl="1"/>
+            <a:r>
+              <a:rPr lang="en-IN" dirty="0"/>
+              <a:t>Why it works?: TF-IDF helps the model to detect linguistic differences between fake news and real news, for example, a real news article contains more neutral terms and professional vocabulary, while fake news articles contain sensational words and misleading terms like “</a:t>
+            </a:r>
+            <a:r>
+              <a:rPr lang="en-IN" dirty="0" err="1"/>
+              <a:t>outrageous”,”Secret</a:t>
+            </a:r>
+            <a:r>
+              <a:rPr lang="en-IN" dirty="0"/>
+              <a:t>” etc</a:t>
+            </a:r>
+          </a:p>
+          <a:p>
+            <a:pPr marL="548640" lvl="2" indent="0">
+              <a:buNone/>
             </a:pPr>
             <a:r>
-              <a:t>Frontend (React Application)</a:t>
-            </a:r>
-          </a:p>
-        </p:txBody>
-      </p:sp>
-      <p:sp>
-        <p:nvSpPr>
-          <p:cNvPr id="3" name="Content Placeholder 2"/>
-          <p:cNvSpPr>
-            <a:spLocks noGrp="1"/>
-          </p:cNvSpPr>
-          <p:nvPr>
-            <p:ph idx="1"/>
-          </p:nvPr>
-        </p:nvSpPr>
-        <p:spPr/>
-        <p:txBody>
-          <a:bodyPr/>
-          <a:lstStyle/>
-          <a:p>
-            <a:endParaRPr/>
-          </a:p>
-          <a:p>
-            <a:pPr>
-              <a:spcAft>
-                <a:spcPts val="500"/>
-              </a:spcAft>
-              <a:defRPr sz="2000"/>
-            </a:pPr>
-            <a:r>
-              <a:t>• Developed using React and Tailwind CSS</a:t>
-            </a:r>
-          </a:p>
-          <a:p>
-            <a:pPr>
-              <a:spcAft>
-                <a:spcPts val="500"/>
-              </a:spcAft>
-              <a:defRPr sz="2000"/>
-            </a:pPr>
-            <a:r>
-              <a:t>• Connects to Flask backend for real-time predictions</a:t>
-            </a:r>
-          </a:p>
-          <a:p>
-            <a:pPr>
-              <a:spcAft>
-                <a:spcPts val="500"/>
-              </a:spcAft>
-              <a:defRPr sz="2000"/>
-            </a:pPr>
-            <a:r>
-              <a:t>• Displays live model metrics (accuracy, F1-score, etc.)</a:t>
-            </a:r>
-          </a:p>
-          <a:p>
-            <a:pPr>
-              <a:spcAft>
-                <a:spcPts val="500"/>
-              </a:spcAft>
-              <a:defRPr sz="2000"/>
-            </a:pPr>
-            <a:r>
-              <a:t>• Interactive design with example news articles and visual confidence bars</a:t>
+              <a:rPr lang="en-US" dirty="0"/>
+              <a:t>  </a:t>
             </a:r>
           </a:p>
         </p:txBody>
       </p:sp>
     </p:spTree>
+    <p:extLst>
+      <p:ext uri="{BB962C8B-B14F-4D97-AF65-F5344CB8AC3E}">
+        <p14:creationId xmlns:p14="http://schemas.microsoft.com/office/powerpoint/2010/main" val="622221411"/>
+      </p:ext>
+    </p:extLst>
   </p:cSld>
   <p:clrMapOvr>
     <a:masterClrMapping/>
@@ -4415,364 +4496,125 @@
       </p:grpSpPr>
       <p:sp>
         <p:nvSpPr>
-          <p:cNvPr id="2" name="Title 1"/>
-          <p:cNvSpPr>
-            <a:spLocks noGrp="1"/>
-          </p:cNvSpPr>
-          <p:nvPr>
-            <p:ph type="title"/>
-          </p:nvPr>
-        </p:nvSpPr>
-        <p:spPr/>
-        <p:txBody>
-          <a:bodyPr/>
-          <a:lstStyle/>
-          <a:p>
-            <a:pPr>
-              <a:defRPr sz="3600" b="1">
-                <a:solidFill>
-                  <a:srgbClr val="003399"/>
-                </a:solidFill>
-              </a:defRPr>
-            </a:pPr>
-            <a:r>
-              <a:rPr dirty="0"/>
-              <a:t>System Workflow</a:t>
-            </a:r>
-          </a:p>
-        </p:txBody>
-      </p:sp>
-      <p:sp>
-        <p:nvSpPr>
-          <p:cNvPr id="3" name="Content Placeholder 2"/>
-          <p:cNvSpPr>
-            <a:spLocks noGrp="1"/>
-          </p:cNvSpPr>
-          <p:nvPr>
-            <p:ph idx="1"/>
-          </p:nvPr>
-        </p:nvSpPr>
-        <p:spPr>
-          <a:xfrm>
-            <a:off x="457200" y="1573327"/>
-            <a:ext cx="8229600" cy="4525963"/>
-          </a:xfrm>
-        </p:spPr>
-        <p:txBody>
-          <a:bodyPr>
-            <a:normAutofit lnSpcReduction="10000"/>
-          </a:bodyPr>
-          <a:lstStyle/>
-          <a:p>
-            <a:pPr marL="0" indent="0" algn="ctr">
-              <a:buNone/>
-            </a:pPr>
-            <a:r>
-              <a:rPr lang="en-IN" sz="2300" dirty="0">
-                <a:latin typeface="Times New Roman" panose="02020603050405020304" pitchFamily="18" charset="0"/>
-                <a:cs typeface="Times New Roman" panose="02020603050405020304" pitchFamily="18" charset="0"/>
-              </a:rPr>
-              <a:t>User inputs news text on the frontend</a:t>
-            </a:r>
-          </a:p>
-          <a:p>
-            <a:pPr marL="0" indent="0" algn="ctr">
-              <a:spcAft>
-                <a:spcPts val="500"/>
-              </a:spcAft>
-              <a:buNone/>
-              <a:defRPr sz="2000"/>
-            </a:pPr>
-            <a:endParaRPr lang="en-IN" sz="2300" dirty="0">
-              <a:latin typeface="Times New Roman" panose="02020603050405020304" pitchFamily="18" charset="0"/>
-              <a:cs typeface="Times New Roman" panose="02020603050405020304" pitchFamily="18" charset="0"/>
-            </a:endParaRPr>
-          </a:p>
-          <a:p>
-            <a:pPr marL="0" indent="0" algn="ctr">
-              <a:spcAft>
-                <a:spcPts val="500"/>
-              </a:spcAft>
-              <a:buNone/>
-              <a:defRPr sz="2000"/>
-            </a:pPr>
-            <a:r>
-              <a:rPr lang="en-IN" sz="2300" dirty="0">
-                <a:latin typeface="Times New Roman" panose="02020603050405020304" pitchFamily="18" charset="0"/>
-                <a:cs typeface="Times New Roman" panose="02020603050405020304" pitchFamily="18" charset="0"/>
-              </a:rPr>
-              <a:t>Text sent to Flask backend via POST request</a:t>
-            </a:r>
-          </a:p>
-          <a:p>
-            <a:pPr marL="0" indent="0" algn="ctr">
-              <a:spcAft>
-                <a:spcPts val="500"/>
-              </a:spcAft>
-              <a:buNone/>
-              <a:defRPr sz="2000"/>
-            </a:pPr>
-            <a:r>
-              <a:rPr lang="en-IN" sz="2300" dirty="0">
-                <a:latin typeface="Times New Roman" panose="02020603050405020304" pitchFamily="18" charset="0"/>
-                <a:cs typeface="Times New Roman" panose="02020603050405020304" pitchFamily="18" charset="0"/>
-              </a:rPr>
-              <a:t>			</a:t>
-            </a:r>
-          </a:p>
-          <a:p>
-            <a:pPr marL="0" indent="0" algn="ctr">
-              <a:spcAft>
-                <a:spcPts val="500"/>
-              </a:spcAft>
-              <a:buNone/>
-              <a:defRPr sz="2000"/>
-            </a:pPr>
-            <a:r>
-              <a:rPr lang="en-IN" sz="2300" dirty="0">
-                <a:latin typeface="Times New Roman" panose="02020603050405020304" pitchFamily="18" charset="0"/>
-                <a:cs typeface="Times New Roman" panose="02020603050405020304" pitchFamily="18" charset="0"/>
-              </a:rPr>
-              <a:t>Text cleaned and transformed using TF-IDF</a:t>
-            </a:r>
-          </a:p>
-          <a:p>
-            <a:pPr marL="0" indent="0" algn="ctr">
-              <a:spcAft>
-                <a:spcPts val="500"/>
-              </a:spcAft>
-              <a:buNone/>
-              <a:defRPr sz="2000"/>
-            </a:pPr>
-            <a:endParaRPr lang="en-IN" sz="2300" dirty="0">
-              <a:latin typeface="Times New Roman" panose="02020603050405020304" pitchFamily="18" charset="0"/>
-              <a:cs typeface="Times New Roman" panose="02020603050405020304" pitchFamily="18" charset="0"/>
-            </a:endParaRPr>
-          </a:p>
-          <a:p>
-            <a:pPr marL="0" indent="0" algn="ctr">
-              <a:spcAft>
-                <a:spcPts val="500"/>
-              </a:spcAft>
-              <a:buNone/>
-              <a:defRPr sz="2000"/>
-            </a:pPr>
-            <a:r>
-              <a:rPr lang="en-IN" sz="2300" dirty="0">
-                <a:latin typeface="Times New Roman" panose="02020603050405020304" pitchFamily="18" charset="0"/>
-                <a:cs typeface="Times New Roman" panose="02020603050405020304" pitchFamily="18" charset="0"/>
-              </a:rPr>
-              <a:t>Logistic Regression model predicts authenticity</a:t>
-            </a:r>
-          </a:p>
-          <a:p>
-            <a:pPr marL="0" indent="0" algn="ctr">
-              <a:spcAft>
-                <a:spcPts val="500"/>
-              </a:spcAft>
-              <a:buNone/>
-              <a:defRPr sz="2000"/>
-            </a:pPr>
-            <a:endParaRPr lang="en-IN" sz="2300" dirty="0">
-              <a:latin typeface="Times New Roman" panose="02020603050405020304" pitchFamily="18" charset="0"/>
-              <a:cs typeface="Times New Roman" panose="02020603050405020304" pitchFamily="18" charset="0"/>
-            </a:endParaRPr>
-          </a:p>
-          <a:p>
-            <a:pPr marL="0" indent="0" algn="ctr">
-              <a:spcAft>
-                <a:spcPts val="500"/>
-              </a:spcAft>
-              <a:buNone/>
-              <a:defRPr sz="2000"/>
-            </a:pPr>
-            <a:r>
-              <a:rPr lang="en-IN" sz="2300" dirty="0">
-                <a:latin typeface="Times New Roman" panose="02020603050405020304" pitchFamily="18" charset="0"/>
-                <a:cs typeface="Times New Roman" panose="02020603050405020304" pitchFamily="18" charset="0"/>
-              </a:rPr>
-              <a:t>Frontend displays result with confidence levels</a:t>
-            </a:r>
-          </a:p>
-        </p:txBody>
-      </p:sp>
-      <p:sp>
-        <p:nvSpPr>
-          <p:cNvPr id="10" name="Arrow: Down 9">
+          <p:cNvPr id="3" name="Content Placeholder 2">
             <a:extLst>
               <a:ext uri="{FF2B5EF4-FFF2-40B4-BE49-F238E27FC236}">
-                <a16:creationId xmlns:a16="http://schemas.microsoft.com/office/drawing/2014/main" id="{705F5EF0-10CA-B82E-C62D-1C66A66AEBBD}"/>
+                <a16:creationId xmlns:a16="http://schemas.microsoft.com/office/drawing/2014/main" id="{7DBB3820-73BA-B844-01FC-D6D785350819}"/>
               </a:ext>
             </a:extLst>
           </p:cNvPr>
-          <p:cNvSpPr/>
-          <p:nvPr/>
+          <p:cNvSpPr>
+            <a:spLocks noGrp="1"/>
+          </p:cNvSpPr>
+          <p:nvPr>
+            <p:ph idx="1"/>
+          </p:nvPr>
         </p:nvSpPr>
         <p:spPr>
           <a:xfrm>
-            <a:off x="4311445" y="2146513"/>
-            <a:ext cx="442452" cy="216310"/>
+            <a:off x="13887" y="887853"/>
+            <a:ext cx="8642555" cy="1588647"/>
           </a:xfrm>
-          <a:prstGeom prst="downArrow">
-            <a:avLst/>
-          </a:prstGeom>
         </p:spPr>
-        <p:style>
-          <a:lnRef idx="1">
-            <a:schemeClr val="accent1"/>
-          </a:lnRef>
-          <a:fillRef idx="3">
-            <a:schemeClr val="accent1"/>
-          </a:fillRef>
-          <a:effectRef idx="2">
-            <a:schemeClr val="accent1"/>
-          </a:effectRef>
-          <a:fontRef idx="minor">
-            <a:schemeClr val="lt1"/>
-          </a:fontRef>
-        </p:style>
-        <p:txBody>
-          <a:bodyPr rtlCol="0" anchor="ctr"/>
-          <a:lstStyle/>
-          <a:p>
-            <a:pPr algn="ctr"/>
+        <p:txBody>
+          <a:bodyPr/>
+          <a:lstStyle/>
+          <a:p>
+            <a:r>
+              <a:rPr lang="en-US" dirty="0"/>
+              <a:t>Logistic regression:</a:t>
+            </a:r>
             <a:endParaRPr lang="en-IN" dirty="0"/>
           </a:p>
-        </p:txBody>
-      </p:sp>
-      <p:sp>
-        <p:nvSpPr>
-          <p:cNvPr id="11" name="Arrow: Down 10">
+          <a:p>
+            <a:pPr lvl="1"/>
+            <a:r>
+              <a:rPr lang="en-IN" dirty="0"/>
+              <a:t>While it’s name has regression, it is actually a classification model</a:t>
+            </a:r>
+          </a:p>
+          <a:p>
+            <a:pPr lvl="1"/>
+            <a:r>
+              <a:rPr lang="en-IN" dirty="0"/>
+              <a:t>It is excellent at finding patterns</a:t>
+            </a:r>
+          </a:p>
+          <a:p>
+            <a:pPr lvl="1"/>
+            <a:r>
+              <a:rPr lang="en-IN" dirty="0"/>
+              <a:t>It assigns weights to words based on how strongly the word correlates to fake or real news, which gets more accurate every time it trains</a:t>
+            </a:r>
+          </a:p>
+        </p:txBody>
+      </p:sp>
+      <p:sp>
+        <p:nvSpPr>
+          <p:cNvPr id="5" name="TextBox 4">
             <a:extLst>
               <a:ext uri="{FF2B5EF4-FFF2-40B4-BE49-F238E27FC236}">
-                <a16:creationId xmlns:a16="http://schemas.microsoft.com/office/drawing/2014/main" id="{1B70830B-C1EB-219C-B081-212C8CB440F8}"/>
+                <a16:creationId xmlns:a16="http://schemas.microsoft.com/office/drawing/2014/main" id="{83FCDFB8-F4D3-74F9-436E-9FE79C4E5AF8}"/>
               </a:ext>
             </a:extLst>
           </p:cNvPr>
-          <p:cNvSpPr/>
+          <p:cNvSpPr txBox="1"/>
           <p:nvPr/>
         </p:nvSpPr>
         <p:spPr>
           <a:xfrm>
-            <a:off x="4311445" y="3177716"/>
-            <a:ext cx="442452" cy="216310"/>
+            <a:off x="212131" y="3346580"/>
+            <a:ext cx="8246069" cy="2862322"/>
           </a:xfrm>
-          <a:prstGeom prst="downArrow">
+          <a:prstGeom prst="rect">
             <a:avLst/>
           </a:prstGeom>
+          <a:noFill/>
         </p:spPr>
-        <p:style>
-          <a:lnRef idx="1">
-            <a:schemeClr val="accent1"/>
-          </a:lnRef>
-          <a:fillRef idx="3">
-            <a:schemeClr val="accent1"/>
-          </a:fillRef>
-          <a:effectRef idx="2">
-            <a:schemeClr val="accent1"/>
-          </a:effectRef>
-          <a:fontRef idx="minor">
-            <a:schemeClr val="lt1"/>
-          </a:fontRef>
-        </p:style>
-        <p:txBody>
-          <a:bodyPr rtlCol="0" anchor="ctr"/>
-          <a:lstStyle/>
-          <a:p>
-            <a:pPr algn="ctr"/>
+        <p:txBody>
+          <a:bodyPr wrap="square" rtlCol="0">
+            <a:spAutoFit/>
+          </a:bodyPr>
+          <a:lstStyle/>
+          <a:p>
+            <a:r>
+              <a:rPr lang="en-US" dirty="0"/>
+              <a:t>Why use them both together?:</a:t>
+            </a:r>
+          </a:p>
+          <a:p>
+            <a:r>
+              <a:rPr lang="en-US" dirty="0">
+                <a:sym typeface="Wingdings" panose="05000000000000000000" pitchFamily="2" charset="2"/>
+              </a:rPr>
+              <a:t>TF-IDF turns text into a vector of meaningful numbers, in which important words get higher value, and common words get a lower value, giving logistic regression clean, weighted inputs</a:t>
+            </a:r>
+          </a:p>
+          <a:p>
+            <a:r>
+              <a:rPr lang="en-US" dirty="0">
+                <a:sym typeface="Wingdings" panose="05000000000000000000" pitchFamily="2" charset="2"/>
+              </a:rPr>
+              <a:t>Logistic regression works well with sparse matrices(i.e. mostly zeroes in the matrix) which is what TF-IDF gives it. So it efficiently learns which words indicate strongly whether an article is fake or real</a:t>
+            </a:r>
+          </a:p>
+          <a:p>
+            <a:r>
+              <a:rPr lang="en-US" dirty="0">
+                <a:sym typeface="Wingdings" panose="05000000000000000000" pitchFamily="2" charset="2"/>
+              </a:rPr>
+              <a:t> Logistic regression trains very quickly, making it work well for website deployment and makes it easy for computers without GPUs to run the program</a:t>
+            </a:r>
             <a:endParaRPr lang="en-IN" dirty="0"/>
           </a:p>
         </p:txBody>
       </p:sp>
-      <p:sp>
-        <p:nvSpPr>
-          <p:cNvPr id="13" name="Arrow: Down 12">
-            <a:extLst>
-              <a:ext uri="{FF2B5EF4-FFF2-40B4-BE49-F238E27FC236}">
-                <a16:creationId xmlns:a16="http://schemas.microsoft.com/office/drawing/2014/main" id="{60B72F4F-2068-50B6-F00B-D86BD684A16F}"/>
-              </a:ext>
-            </a:extLst>
-          </p:cNvPr>
-          <p:cNvSpPr/>
-          <p:nvPr/>
-        </p:nvSpPr>
-        <p:spPr>
-          <a:xfrm>
-            <a:off x="4291780" y="4987854"/>
-            <a:ext cx="442452" cy="216310"/>
-          </a:xfrm>
-          <a:prstGeom prst="downArrow">
-            <a:avLst/>
-          </a:prstGeom>
-        </p:spPr>
-        <p:style>
-          <a:lnRef idx="1">
-            <a:schemeClr val="accent1"/>
-          </a:lnRef>
-          <a:fillRef idx="3">
-            <a:schemeClr val="accent1"/>
-          </a:fillRef>
-          <a:effectRef idx="2">
-            <a:schemeClr val="accent1"/>
-          </a:effectRef>
-          <a:fontRef idx="minor">
-            <a:schemeClr val="lt1"/>
-          </a:fontRef>
-        </p:style>
-        <p:txBody>
-          <a:bodyPr rtlCol="0" anchor="ctr"/>
-          <a:lstStyle/>
-          <a:p>
-            <a:pPr algn="ctr"/>
-            <a:endParaRPr lang="en-IN" dirty="0"/>
-          </a:p>
-        </p:txBody>
-      </p:sp>
-      <p:sp>
-        <p:nvSpPr>
-          <p:cNvPr id="14" name="Arrow: Down 13">
-            <a:extLst>
-              <a:ext uri="{FF2B5EF4-FFF2-40B4-BE49-F238E27FC236}">
-                <a16:creationId xmlns:a16="http://schemas.microsoft.com/office/drawing/2014/main" id="{EE862FF5-8828-5415-ED6E-30CF249E605D}"/>
-              </a:ext>
-            </a:extLst>
-          </p:cNvPr>
-          <p:cNvSpPr/>
-          <p:nvPr/>
-        </p:nvSpPr>
-        <p:spPr>
-          <a:xfrm>
-            <a:off x="4311445" y="4092729"/>
-            <a:ext cx="442452" cy="216310"/>
-          </a:xfrm>
-          <a:prstGeom prst="downArrow">
-            <a:avLst/>
-          </a:prstGeom>
-        </p:spPr>
-        <p:style>
-          <a:lnRef idx="1">
-            <a:schemeClr val="accent1"/>
-          </a:lnRef>
-          <a:fillRef idx="3">
-            <a:schemeClr val="accent1"/>
-          </a:fillRef>
-          <a:effectRef idx="2">
-            <a:schemeClr val="accent1"/>
-          </a:effectRef>
-          <a:fontRef idx="minor">
-            <a:schemeClr val="lt1"/>
-          </a:fontRef>
-        </p:style>
-        <p:txBody>
-          <a:bodyPr rtlCol="0" anchor="ctr"/>
-          <a:lstStyle/>
-          <a:p>
-            <a:pPr algn="ctr"/>
-            <a:endParaRPr lang="en-IN" dirty="0"/>
-          </a:p>
-        </p:txBody>
-      </p:sp>
     </p:spTree>
+    <p:extLst>
+      <p:ext uri="{BB962C8B-B14F-4D97-AF65-F5344CB8AC3E}">
+        <p14:creationId xmlns:p14="http://schemas.microsoft.com/office/powerpoint/2010/main" val="2049634924"/>
+      </p:ext>
+    </p:extLst>
   </p:cSld>
   <p:clrMapOvr>
     <a:masterClrMapping/>
@@ -4820,7 +4662,7 @@
               </a:defRPr>
             </a:pPr>
             <a:r>
-              <a:t>Technologies Used</a:t>
+              <a:t>Frontend (React Application)</a:t>
             </a:r>
           </a:p>
         </p:txBody>
@@ -4835,17 +4677,12 @@
             <p:ph idx="1"/>
           </p:nvPr>
         </p:nvSpPr>
-        <p:spPr>
-          <a:xfrm>
-            <a:off x="607142" y="2807208"/>
-            <a:ext cx="7772400" cy="4050792"/>
-          </a:xfrm>
-        </p:spPr>
+        <p:spPr/>
         <p:txBody>
           <a:bodyPr/>
           <a:lstStyle/>
           <a:p>
-            <a:endParaRPr dirty="0"/>
+            <a:endParaRPr/>
           </a:p>
           <a:p>
             <a:pPr>
@@ -4855,8 +4692,7 @@
               <a:defRPr sz="2000"/>
             </a:pPr>
             <a:r>
-              <a:rPr sz="2500" dirty="0"/>
-              <a:t>🔹 Backend: Python, Flask, Pandas, Scikit-learn</a:t>
+              <a:t>• Developed using React and Tailwind CSS</a:t>
             </a:r>
           </a:p>
           <a:p>
@@ -4867,8 +4703,7 @@
               <a:defRPr sz="2000"/>
             </a:pPr>
             <a:r>
-              <a:rPr sz="2500" dirty="0"/>
-              <a:t>🔹 Frontend: React.js, Tailwind CSS, Babel</a:t>
+              <a:t>• Connects to Flask backend for real-time predictions</a:t>
             </a:r>
           </a:p>
           <a:p>
@@ -4879,8 +4714,7 @@
               <a:defRPr sz="2000"/>
             </a:pPr>
             <a:r>
-              <a:rPr sz="2500" dirty="0"/>
-              <a:t>🔹 Model Storage: Pickle</a:t>
+              <a:t>• Displays live model metrics (accuracy, F1-score, etc.)</a:t>
             </a:r>
           </a:p>
           <a:p>
@@ -4891,8 +4725,7 @@
               <a:defRPr sz="2000"/>
             </a:pPr>
             <a:r>
-              <a:rPr sz="2500" dirty="0"/>
-              <a:t>🔹 Communication: RESTful APIs with JSON</a:t>
+              <a:t>• Interactive design with example news articles and visual confidence bars</a:t>
             </a:r>
           </a:p>
         </p:txBody>
@@ -4906,6 +4739,515 @@
 </file>
 
 <file path=ppt/slides/slide14.xml><?xml version="1.0" encoding="utf-8"?>
+<p:sld xmlns:a="http://schemas.openxmlformats.org/drawingml/2006/main" xmlns:r="http://schemas.openxmlformats.org/officeDocument/2006/relationships" xmlns:p="http://schemas.openxmlformats.org/presentationml/2006/main">
+  <p:cSld>
+    <p:spTree>
+      <p:nvGrpSpPr>
+        <p:cNvPr id="1" name=""/>
+        <p:cNvGrpSpPr/>
+        <p:nvPr/>
+      </p:nvGrpSpPr>
+      <p:grpSpPr>
+        <a:xfrm>
+          <a:off x="0" y="0"/>
+          <a:ext cx="0" cy="0"/>
+          <a:chOff x="0" y="0"/>
+          <a:chExt cx="0" cy="0"/>
+        </a:xfrm>
+      </p:grpSpPr>
+      <p:sp>
+        <p:nvSpPr>
+          <p:cNvPr id="2" name="Title 1"/>
+          <p:cNvSpPr>
+            <a:spLocks noGrp="1"/>
+          </p:cNvSpPr>
+          <p:nvPr>
+            <p:ph type="title"/>
+          </p:nvPr>
+        </p:nvSpPr>
+        <p:spPr/>
+        <p:txBody>
+          <a:bodyPr/>
+          <a:lstStyle/>
+          <a:p>
+            <a:pPr>
+              <a:defRPr sz="3600" b="1">
+                <a:solidFill>
+                  <a:srgbClr val="003399"/>
+                </a:solidFill>
+              </a:defRPr>
+            </a:pPr>
+            <a:r>
+              <a:rPr dirty="0"/>
+              <a:t>System Workflow</a:t>
+            </a:r>
+          </a:p>
+        </p:txBody>
+      </p:sp>
+      <p:sp>
+        <p:nvSpPr>
+          <p:cNvPr id="3" name="Content Placeholder 2"/>
+          <p:cNvSpPr>
+            <a:spLocks noGrp="1"/>
+          </p:cNvSpPr>
+          <p:nvPr>
+            <p:ph idx="1"/>
+          </p:nvPr>
+        </p:nvSpPr>
+        <p:spPr>
+          <a:xfrm>
+            <a:off x="457200" y="1573327"/>
+            <a:ext cx="8229600" cy="4525963"/>
+          </a:xfrm>
+        </p:spPr>
+        <p:txBody>
+          <a:bodyPr>
+            <a:normAutofit lnSpcReduction="10000"/>
+          </a:bodyPr>
+          <a:lstStyle/>
+          <a:p>
+            <a:pPr marL="0" indent="0" algn="ctr">
+              <a:buNone/>
+            </a:pPr>
+            <a:r>
+              <a:rPr lang="en-IN" sz="2300" dirty="0">
+                <a:latin typeface="Times New Roman" panose="02020603050405020304" pitchFamily="18" charset="0"/>
+                <a:cs typeface="Times New Roman" panose="02020603050405020304" pitchFamily="18" charset="0"/>
+              </a:rPr>
+              <a:t>User inputs news text on the frontend</a:t>
+            </a:r>
+          </a:p>
+          <a:p>
+            <a:pPr marL="0" indent="0" algn="ctr">
+              <a:spcAft>
+                <a:spcPts val="500"/>
+              </a:spcAft>
+              <a:buNone/>
+              <a:defRPr sz="2000"/>
+            </a:pPr>
+            <a:endParaRPr lang="en-IN" sz="2300" dirty="0">
+              <a:latin typeface="Times New Roman" panose="02020603050405020304" pitchFamily="18" charset="0"/>
+              <a:cs typeface="Times New Roman" panose="02020603050405020304" pitchFamily="18" charset="0"/>
+            </a:endParaRPr>
+          </a:p>
+          <a:p>
+            <a:pPr marL="0" indent="0" algn="ctr">
+              <a:spcAft>
+                <a:spcPts val="500"/>
+              </a:spcAft>
+              <a:buNone/>
+              <a:defRPr sz="2000"/>
+            </a:pPr>
+            <a:r>
+              <a:rPr lang="en-IN" sz="2300" dirty="0">
+                <a:latin typeface="Times New Roman" panose="02020603050405020304" pitchFamily="18" charset="0"/>
+                <a:cs typeface="Times New Roman" panose="02020603050405020304" pitchFamily="18" charset="0"/>
+              </a:rPr>
+              <a:t>Text sent to Flask backend via POST request</a:t>
+            </a:r>
+          </a:p>
+          <a:p>
+            <a:pPr marL="0" indent="0" algn="ctr">
+              <a:spcAft>
+                <a:spcPts val="500"/>
+              </a:spcAft>
+              <a:buNone/>
+              <a:defRPr sz="2000"/>
+            </a:pPr>
+            <a:r>
+              <a:rPr lang="en-IN" sz="2300" dirty="0">
+                <a:latin typeface="Times New Roman" panose="02020603050405020304" pitchFamily="18" charset="0"/>
+                <a:cs typeface="Times New Roman" panose="02020603050405020304" pitchFamily="18" charset="0"/>
+              </a:rPr>
+              <a:t>			</a:t>
+            </a:r>
+          </a:p>
+          <a:p>
+            <a:pPr marL="0" indent="0" algn="ctr">
+              <a:spcAft>
+                <a:spcPts val="500"/>
+              </a:spcAft>
+              <a:buNone/>
+              <a:defRPr sz="2000"/>
+            </a:pPr>
+            <a:r>
+              <a:rPr lang="en-IN" sz="2300" dirty="0">
+                <a:latin typeface="Times New Roman" panose="02020603050405020304" pitchFamily="18" charset="0"/>
+                <a:cs typeface="Times New Roman" panose="02020603050405020304" pitchFamily="18" charset="0"/>
+              </a:rPr>
+              <a:t>Text cleaned and transformed using TF-IDF</a:t>
+            </a:r>
+          </a:p>
+          <a:p>
+            <a:pPr marL="0" indent="0" algn="ctr">
+              <a:spcAft>
+                <a:spcPts val="500"/>
+              </a:spcAft>
+              <a:buNone/>
+              <a:defRPr sz="2000"/>
+            </a:pPr>
+            <a:endParaRPr lang="en-IN" sz="2300" dirty="0">
+              <a:latin typeface="Times New Roman" panose="02020603050405020304" pitchFamily="18" charset="0"/>
+              <a:cs typeface="Times New Roman" panose="02020603050405020304" pitchFamily="18" charset="0"/>
+            </a:endParaRPr>
+          </a:p>
+          <a:p>
+            <a:pPr marL="0" indent="0" algn="ctr">
+              <a:spcAft>
+                <a:spcPts val="500"/>
+              </a:spcAft>
+              <a:buNone/>
+              <a:defRPr sz="2000"/>
+            </a:pPr>
+            <a:r>
+              <a:rPr lang="en-IN" sz="2300" dirty="0">
+                <a:latin typeface="Times New Roman" panose="02020603050405020304" pitchFamily="18" charset="0"/>
+                <a:cs typeface="Times New Roman" panose="02020603050405020304" pitchFamily="18" charset="0"/>
+              </a:rPr>
+              <a:t>Logistic Regression model predicts authenticity</a:t>
+            </a:r>
+          </a:p>
+          <a:p>
+            <a:pPr marL="0" indent="0" algn="ctr">
+              <a:spcAft>
+                <a:spcPts val="500"/>
+              </a:spcAft>
+              <a:buNone/>
+              <a:defRPr sz="2000"/>
+            </a:pPr>
+            <a:endParaRPr lang="en-IN" sz="2300" dirty="0">
+              <a:latin typeface="Times New Roman" panose="02020603050405020304" pitchFamily="18" charset="0"/>
+              <a:cs typeface="Times New Roman" panose="02020603050405020304" pitchFamily="18" charset="0"/>
+            </a:endParaRPr>
+          </a:p>
+          <a:p>
+            <a:pPr marL="0" indent="0" algn="ctr">
+              <a:spcAft>
+                <a:spcPts val="500"/>
+              </a:spcAft>
+              <a:buNone/>
+              <a:defRPr sz="2000"/>
+            </a:pPr>
+            <a:r>
+              <a:rPr lang="en-IN" sz="2300" dirty="0">
+                <a:latin typeface="Times New Roman" panose="02020603050405020304" pitchFamily="18" charset="0"/>
+                <a:cs typeface="Times New Roman" panose="02020603050405020304" pitchFamily="18" charset="0"/>
+              </a:rPr>
+              <a:t>Frontend displays result with confidence levels</a:t>
+            </a:r>
+          </a:p>
+        </p:txBody>
+      </p:sp>
+      <p:sp>
+        <p:nvSpPr>
+          <p:cNvPr id="10" name="Arrow: Down 9">
+            <a:extLst>
+              <a:ext uri="{FF2B5EF4-FFF2-40B4-BE49-F238E27FC236}">
+                <a16:creationId xmlns:a16="http://schemas.microsoft.com/office/drawing/2014/main" id="{705F5EF0-10CA-B82E-C62D-1C66A66AEBBD}"/>
+              </a:ext>
+            </a:extLst>
+          </p:cNvPr>
+          <p:cNvSpPr/>
+          <p:nvPr/>
+        </p:nvSpPr>
+        <p:spPr>
+          <a:xfrm>
+            <a:off x="4311445" y="2146513"/>
+            <a:ext cx="442452" cy="216310"/>
+          </a:xfrm>
+          <a:prstGeom prst="downArrow">
+            <a:avLst/>
+          </a:prstGeom>
+        </p:spPr>
+        <p:style>
+          <a:lnRef idx="1">
+            <a:schemeClr val="accent1"/>
+          </a:lnRef>
+          <a:fillRef idx="3">
+            <a:schemeClr val="accent1"/>
+          </a:fillRef>
+          <a:effectRef idx="2">
+            <a:schemeClr val="accent1"/>
+          </a:effectRef>
+          <a:fontRef idx="minor">
+            <a:schemeClr val="lt1"/>
+          </a:fontRef>
+        </p:style>
+        <p:txBody>
+          <a:bodyPr rtlCol="0" anchor="ctr"/>
+          <a:lstStyle/>
+          <a:p>
+            <a:pPr algn="ctr"/>
+            <a:endParaRPr lang="en-IN" dirty="0"/>
+          </a:p>
+        </p:txBody>
+      </p:sp>
+      <p:sp>
+        <p:nvSpPr>
+          <p:cNvPr id="11" name="Arrow: Down 10">
+            <a:extLst>
+              <a:ext uri="{FF2B5EF4-FFF2-40B4-BE49-F238E27FC236}">
+                <a16:creationId xmlns:a16="http://schemas.microsoft.com/office/drawing/2014/main" id="{1B70830B-C1EB-219C-B081-212C8CB440F8}"/>
+              </a:ext>
+            </a:extLst>
+          </p:cNvPr>
+          <p:cNvSpPr/>
+          <p:nvPr/>
+        </p:nvSpPr>
+        <p:spPr>
+          <a:xfrm>
+            <a:off x="4311445" y="3177716"/>
+            <a:ext cx="442452" cy="216310"/>
+          </a:xfrm>
+          <a:prstGeom prst="downArrow">
+            <a:avLst/>
+          </a:prstGeom>
+        </p:spPr>
+        <p:style>
+          <a:lnRef idx="1">
+            <a:schemeClr val="accent1"/>
+          </a:lnRef>
+          <a:fillRef idx="3">
+            <a:schemeClr val="accent1"/>
+          </a:fillRef>
+          <a:effectRef idx="2">
+            <a:schemeClr val="accent1"/>
+          </a:effectRef>
+          <a:fontRef idx="minor">
+            <a:schemeClr val="lt1"/>
+          </a:fontRef>
+        </p:style>
+        <p:txBody>
+          <a:bodyPr rtlCol="0" anchor="ctr"/>
+          <a:lstStyle/>
+          <a:p>
+            <a:pPr algn="ctr"/>
+            <a:endParaRPr lang="en-IN" dirty="0"/>
+          </a:p>
+        </p:txBody>
+      </p:sp>
+      <p:sp>
+        <p:nvSpPr>
+          <p:cNvPr id="13" name="Arrow: Down 12">
+            <a:extLst>
+              <a:ext uri="{FF2B5EF4-FFF2-40B4-BE49-F238E27FC236}">
+                <a16:creationId xmlns:a16="http://schemas.microsoft.com/office/drawing/2014/main" id="{60B72F4F-2068-50B6-F00B-D86BD684A16F}"/>
+              </a:ext>
+            </a:extLst>
+          </p:cNvPr>
+          <p:cNvSpPr/>
+          <p:nvPr/>
+        </p:nvSpPr>
+        <p:spPr>
+          <a:xfrm>
+            <a:off x="4291780" y="4987854"/>
+            <a:ext cx="442452" cy="216310"/>
+          </a:xfrm>
+          <a:prstGeom prst="downArrow">
+            <a:avLst/>
+          </a:prstGeom>
+        </p:spPr>
+        <p:style>
+          <a:lnRef idx="1">
+            <a:schemeClr val="accent1"/>
+          </a:lnRef>
+          <a:fillRef idx="3">
+            <a:schemeClr val="accent1"/>
+          </a:fillRef>
+          <a:effectRef idx="2">
+            <a:schemeClr val="accent1"/>
+          </a:effectRef>
+          <a:fontRef idx="minor">
+            <a:schemeClr val="lt1"/>
+          </a:fontRef>
+        </p:style>
+        <p:txBody>
+          <a:bodyPr rtlCol="0" anchor="ctr"/>
+          <a:lstStyle/>
+          <a:p>
+            <a:pPr algn="ctr"/>
+            <a:endParaRPr lang="en-IN" dirty="0"/>
+          </a:p>
+        </p:txBody>
+      </p:sp>
+      <p:sp>
+        <p:nvSpPr>
+          <p:cNvPr id="14" name="Arrow: Down 13">
+            <a:extLst>
+              <a:ext uri="{FF2B5EF4-FFF2-40B4-BE49-F238E27FC236}">
+                <a16:creationId xmlns:a16="http://schemas.microsoft.com/office/drawing/2014/main" id="{EE862FF5-8828-5415-ED6E-30CF249E605D}"/>
+              </a:ext>
+            </a:extLst>
+          </p:cNvPr>
+          <p:cNvSpPr/>
+          <p:nvPr/>
+        </p:nvSpPr>
+        <p:spPr>
+          <a:xfrm>
+            <a:off x="4311445" y="4092729"/>
+            <a:ext cx="442452" cy="216310"/>
+          </a:xfrm>
+          <a:prstGeom prst="downArrow">
+            <a:avLst/>
+          </a:prstGeom>
+        </p:spPr>
+        <p:style>
+          <a:lnRef idx="1">
+            <a:schemeClr val="accent1"/>
+          </a:lnRef>
+          <a:fillRef idx="3">
+            <a:schemeClr val="accent1"/>
+          </a:fillRef>
+          <a:effectRef idx="2">
+            <a:schemeClr val="accent1"/>
+          </a:effectRef>
+          <a:fontRef idx="minor">
+            <a:schemeClr val="lt1"/>
+          </a:fontRef>
+        </p:style>
+        <p:txBody>
+          <a:bodyPr rtlCol="0" anchor="ctr"/>
+          <a:lstStyle/>
+          <a:p>
+            <a:pPr algn="ctr"/>
+            <a:endParaRPr lang="en-IN" dirty="0"/>
+          </a:p>
+        </p:txBody>
+      </p:sp>
+    </p:spTree>
+  </p:cSld>
+  <p:clrMapOvr>
+    <a:masterClrMapping/>
+  </p:clrMapOvr>
+</p:sld>
+</file>
+
+<file path=ppt/slides/slide15.xml><?xml version="1.0" encoding="utf-8"?>
+<p:sld xmlns:a="http://schemas.openxmlformats.org/drawingml/2006/main" xmlns:r="http://schemas.openxmlformats.org/officeDocument/2006/relationships" xmlns:p="http://schemas.openxmlformats.org/presentationml/2006/main">
+  <p:cSld>
+    <p:spTree>
+      <p:nvGrpSpPr>
+        <p:cNvPr id="1" name=""/>
+        <p:cNvGrpSpPr/>
+        <p:nvPr/>
+      </p:nvGrpSpPr>
+      <p:grpSpPr>
+        <a:xfrm>
+          <a:off x="0" y="0"/>
+          <a:ext cx="0" cy="0"/>
+          <a:chOff x="0" y="0"/>
+          <a:chExt cx="0" cy="0"/>
+        </a:xfrm>
+      </p:grpSpPr>
+      <p:sp>
+        <p:nvSpPr>
+          <p:cNvPr id="2" name="Title 1"/>
+          <p:cNvSpPr>
+            <a:spLocks noGrp="1"/>
+          </p:cNvSpPr>
+          <p:nvPr>
+            <p:ph type="title"/>
+          </p:nvPr>
+        </p:nvSpPr>
+        <p:spPr/>
+        <p:txBody>
+          <a:bodyPr/>
+          <a:lstStyle/>
+          <a:p>
+            <a:pPr>
+              <a:defRPr sz="3600" b="1">
+                <a:solidFill>
+                  <a:srgbClr val="003399"/>
+                </a:solidFill>
+              </a:defRPr>
+            </a:pPr>
+            <a:r>
+              <a:t>Technologies Used</a:t>
+            </a:r>
+          </a:p>
+        </p:txBody>
+      </p:sp>
+      <p:sp>
+        <p:nvSpPr>
+          <p:cNvPr id="3" name="Content Placeholder 2"/>
+          <p:cNvSpPr>
+            <a:spLocks noGrp="1"/>
+          </p:cNvSpPr>
+          <p:nvPr>
+            <p:ph idx="1"/>
+          </p:nvPr>
+        </p:nvSpPr>
+        <p:spPr>
+          <a:xfrm>
+            <a:off x="607142" y="2807208"/>
+            <a:ext cx="7772400" cy="4050792"/>
+          </a:xfrm>
+        </p:spPr>
+        <p:txBody>
+          <a:bodyPr/>
+          <a:lstStyle/>
+          <a:p>
+            <a:endParaRPr dirty="0"/>
+          </a:p>
+          <a:p>
+            <a:pPr>
+              <a:spcAft>
+                <a:spcPts val="500"/>
+              </a:spcAft>
+              <a:defRPr sz="2000"/>
+            </a:pPr>
+            <a:r>
+              <a:rPr sz="2500" dirty="0"/>
+              <a:t>🔹 Backend: Python, Flask, Pandas, Scikit-learn</a:t>
+            </a:r>
+          </a:p>
+          <a:p>
+            <a:pPr>
+              <a:spcAft>
+                <a:spcPts val="500"/>
+              </a:spcAft>
+              <a:defRPr sz="2000"/>
+            </a:pPr>
+            <a:r>
+              <a:rPr sz="2500" dirty="0"/>
+              <a:t>🔹 Frontend: React.js, Tailwind CSS, Babel</a:t>
+            </a:r>
+          </a:p>
+          <a:p>
+            <a:pPr>
+              <a:spcAft>
+                <a:spcPts val="500"/>
+              </a:spcAft>
+              <a:defRPr sz="2000"/>
+            </a:pPr>
+            <a:r>
+              <a:rPr sz="2500" dirty="0"/>
+              <a:t>🔹 Model Storage: Pickle</a:t>
+            </a:r>
+          </a:p>
+          <a:p>
+            <a:pPr>
+              <a:spcAft>
+                <a:spcPts val="500"/>
+              </a:spcAft>
+              <a:defRPr sz="2000"/>
+            </a:pPr>
+            <a:r>
+              <a:rPr sz="2500" dirty="0"/>
+              <a:t>🔹 Communication: RESTful APIs with JSON</a:t>
+            </a:r>
+          </a:p>
+        </p:txBody>
+      </p:sp>
+    </p:spTree>
+  </p:cSld>
+  <p:clrMapOvr>
+    <a:masterClrMapping/>
+  </p:clrMapOvr>
+</p:sld>
+</file>
+
+<file path=ppt/slides/slide16.xml><?xml version="1.0" encoding="utf-8"?>
 <p:sld xmlns:a="http://schemas.openxmlformats.org/drawingml/2006/main" xmlns:r="http://schemas.openxmlformats.org/officeDocument/2006/relationships" xmlns:p="http://schemas.openxmlformats.org/presentationml/2006/main">
   <p:cSld>
     <p:spTree>
@@ -5002,7 +5344,7 @@
 </p:sld>
 </file>
 
-<file path=ppt/slides/slide15.xml><?xml version="1.0" encoding="utf-8"?>
+<file path=ppt/slides/slide17.xml><?xml version="1.0" encoding="utf-8"?>
 <p:sld xmlns:a="http://schemas.openxmlformats.org/drawingml/2006/main" xmlns:r="http://schemas.openxmlformats.org/officeDocument/2006/relationships" xmlns:p="http://schemas.openxmlformats.org/presentationml/2006/main">
   <p:cSld>
     <p:spTree>
@@ -5130,7 +5472,7 @@
 </p:sld>
 </file>
 
-<file path=ppt/slides/slide16.xml><?xml version="1.0" encoding="utf-8"?>
+<file path=ppt/slides/slide18.xml><?xml version="1.0" encoding="utf-8"?>
 <p:sld xmlns:a="http://schemas.openxmlformats.org/drawingml/2006/main" xmlns:r="http://schemas.openxmlformats.org/officeDocument/2006/relationships" xmlns:p="http://schemas.openxmlformats.org/presentationml/2006/main">
   <p:cSld>
     <p:spTree>
@@ -5265,7 +5607,7 @@
 </p:sld>
 </file>
 
-<file path=ppt/slides/slide17.xml><?xml version="1.0" encoding="utf-8"?>
+<file path=ppt/slides/slide19.xml><?xml version="1.0" encoding="utf-8"?>
 <p:sld xmlns:a="http://schemas.openxmlformats.org/drawingml/2006/main" xmlns:r="http://schemas.openxmlformats.org/officeDocument/2006/relationships" xmlns:p="http://schemas.openxmlformats.org/presentationml/2006/main">
   <p:cSld>
     <p:spTree>

--- a/Fake news detection presentation.pptx
+++ b/Fake news detection presentation.pptx
@@ -5440,7 +5440,7 @@
         </p:nvSpPr>
         <p:spPr>
           <a:xfrm>
-            <a:off x="137652" y="4580849"/>
+            <a:off x="160020" y="5033133"/>
             <a:ext cx="8191008" cy="646331"/>
           </a:xfrm>
           <a:prstGeom prst="rect">

--- a/Fake news detection presentation.pptx
+++ b/Fake news detection presentation.pptx
@@ -546,7 +546,7 @@
           <a:p>
             <a:fld id="{5BCAD085-E8A6-8845-BD4E-CB4CCA059FC4}" type="datetimeFigureOut">
               <a:rPr lang="en-US" smtClean="0"/>
-              <a:t>11/16/2025</a:t>
+              <a:t>11/17/2025</a:t>
             </a:fld>
             <a:endParaRPr lang="en-US"/>
           </a:p>
@@ -730,7 +730,7 @@
           <a:p>
             <a:fld id="{5BCAD085-E8A6-8845-BD4E-CB4CCA059FC4}" type="datetimeFigureOut">
               <a:rPr lang="en-US" smtClean="0"/>
-              <a:t>11/16/2025</a:t>
+              <a:t>11/17/2025</a:t>
             </a:fld>
             <a:endParaRPr lang="en-US"/>
           </a:p>
@@ -914,7 +914,7 @@
           <a:p>
             <a:fld id="{5BCAD085-E8A6-8845-BD4E-CB4CCA059FC4}" type="datetimeFigureOut">
               <a:rPr lang="en-US" smtClean="0"/>
-              <a:t>11/16/2025</a:t>
+              <a:t>11/17/2025</a:t>
             </a:fld>
             <a:endParaRPr lang="en-US"/>
           </a:p>
@@ -1084,7 +1084,7 @@
           <a:p>
             <a:fld id="{5BCAD085-E8A6-8845-BD4E-CB4CCA059FC4}" type="datetimeFigureOut">
               <a:rPr lang="en-US" smtClean="0"/>
-              <a:t>11/16/2025</a:t>
+              <a:t>11/17/2025</a:t>
             </a:fld>
             <a:endParaRPr lang="en-US"/>
           </a:p>
@@ -1409,7 +1409,7 @@
           <a:p>
             <a:fld id="{5BCAD085-E8A6-8845-BD4E-CB4CCA059FC4}" type="datetimeFigureOut">
               <a:rPr lang="en-US" smtClean="0"/>
-              <a:t>11/16/2025</a:t>
+              <a:t>11/17/2025</a:t>
             </a:fld>
             <a:endParaRPr lang="en-US"/>
           </a:p>
@@ -1807,7 +1807,7 @@
           <a:p>
             <a:fld id="{5BCAD085-E8A6-8845-BD4E-CB4CCA059FC4}" type="datetimeFigureOut">
               <a:rPr lang="en-US" smtClean="0"/>
-              <a:t>11/16/2025</a:t>
+              <a:t>11/17/2025</a:t>
             </a:fld>
             <a:endParaRPr lang="en-US"/>
           </a:p>
@@ -2241,7 +2241,7 @@
           <a:p>
             <a:fld id="{5BCAD085-E8A6-8845-BD4E-CB4CCA059FC4}" type="datetimeFigureOut">
               <a:rPr lang="en-US" smtClean="0"/>
-              <a:t>11/16/2025</a:t>
+              <a:t>11/17/2025</a:t>
             </a:fld>
             <a:endParaRPr lang="en-US"/>
           </a:p>
@@ -2369,7 +2369,7 @@
           <a:p>
             <a:fld id="{5BCAD085-E8A6-8845-BD4E-CB4CCA059FC4}" type="datetimeFigureOut">
               <a:rPr lang="en-US" smtClean="0"/>
-              <a:t>11/16/2025</a:t>
+              <a:t>11/17/2025</a:t>
             </a:fld>
             <a:endParaRPr lang="en-US"/>
           </a:p>
@@ -2474,7 +2474,7 @@
           <a:p>
             <a:fld id="{5BCAD085-E8A6-8845-BD4E-CB4CCA059FC4}" type="datetimeFigureOut">
               <a:rPr lang="en-US" smtClean="0"/>
-              <a:t>11/16/2025</a:t>
+              <a:t>11/17/2025</a:t>
             </a:fld>
             <a:endParaRPr lang="en-US"/>
           </a:p>
@@ -2915,7 +2915,7 @@
           <a:p>
             <a:fld id="{5BCAD085-E8A6-8845-BD4E-CB4CCA059FC4}" type="datetimeFigureOut">
               <a:rPr lang="en-US" smtClean="0"/>
-              <a:t>11/16/2025</a:t>
+              <a:t>11/17/2025</a:t>
             </a:fld>
             <a:endParaRPr lang="en-US"/>
           </a:p>
@@ -3342,7 +3342,7 @@
           <a:p>
             <a:fld id="{5BCAD085-E8A6-8845-BD4E-CB4CCA059FC4}" type="datetimeFigureOut">
               <a:rPr lang="en-US" smtClean="0"/>
-              <a:t>11/16/2025</a:t>
+              <a:t>11/17/2025</a:t>
             </a:fld>
             <a:endParaRPr lang="en-US"/>
           </a:p>
@@ -3627,7 +3627,7 @@
           <a:p>
             <a:fld id="{5BCAD085-E8A6-8845-BD4E-CB4CCA059FC4}" type="datetimeFigureOut">
               <a:rPr lang="en-US" smtClean="0"/>
-              <a:t>11/16/2025</a:t>
+              <a:t>11/17/2025</a:t>
             </a:fld>
             <a:endParaRPr lang="en-US"/>
           </a:p>
@@ -4153,8 +4153,45 @@
           <a:lstStyle/>
           <a:p>
             <a:r>
+              <a:rPr dirty="0"/>
               <a:t>AI-Powered Detection using Flask, Machine Learning, and React</a:t>
             </a:r>
+          </a:p>
+        </p:txBody>
+      </p:sp>
+      <p:sp>
+        <p:nvSpPr>
+          <p:cNvPr id="4" name="TextBox 3">
+            <a:extLst>
+              <a:ext uri="{FF2B5EF4-FFF2-40B4-BE49-F238E27FC236}">
+                <a16:creationId xmlns:a16="http://schemas.microsoft.com/office/drawing/2014/main" id="{D61D4B2A-2AE5-6EF7-1DE1-A59FB7AE088C}"/>
+              </a:ext>
+            </a:extLst>
+          </p:cNvPr>
+          <p:cNvSpPr txBox="1"/>
+          <p:nvPr/>
+        </p:nvSpPr>
+        <p:spPr>
+          <a:xfrm>
+            <a:off x="802387" y="5771535"/>
+            <a:ext cx="5918454" cy="369332"/>
+          </a:xfrm>
+          <a:prstGeom prst="rect">
+            <a:avLst/>
+          </a:prstGeom>
+          <a:noFill/>
+        </p:spPr>
+        <p:txBody>
+          <a:bodyPr wrap="square" rtlCol="0">
+            <a:spAutoFit/>
+          </a:bodyPr>
+          <a:lstStyle/>
+          <a:p>
+            <a:r>
+              <a:rPr lang="en-US" dirty="0"/>
+              <a:t>-by Abhrojit Bhattacharyya and Moksh Pandit</a:t>
+            </a:r>
+            <a:endParaRPr lang="en-IN" dirty="0"/>
           </a:p>
         </p:txBody>
       </p:sp>
@@ -4512,12 +4549,14 @@
         </p:nvSpPr>
         <p:spPr>
           <a:xfrm>
-            <a:off x="13887" y="887853"/>
-            <a:ext cx="8642555" cy="1588647"/>
+            <a:off x="13887" y="887852"/>
+            <a:ext cx="8642555" cy="2458727"/>
           </a:xfrm>
         </p:spPr>
         <p:txBody>
-          <a:bodyPr/>
+          <a:bodyPr>
+            <a:normAutofit/>
+          </a:bodyPr>
           <a:lstStyle/>
           <a:p>
             <a:r>
@@ -4545,6 +4584,13 @@
             <a:r>
               <a:rPr lang="en-IN" dirty="0"/>
               <a:t>It assigns weights to words based on how strongly the word correlates to fake or real news, which gets more accurate every time it trains</a:t>
+            </a:r>
+          </a:p>
+          <a:p>
+            <a:pPr lvl="1"/>
+            <a:r>
+              <a:rPr lang="en-IN" dirty="0"/>
+              <a:t>It puts the weights and TF-IDF scores of words through a linear equation, and turns the result of that equation into a probability through another, which tells us if the article is fake or real</a:t>
             </a:r>
           </a:p>
         </p:txBody>

--- a/Fake news detection presentation.pptx
+++ b/Fake news detection presentation.pptx
@@ -23,7 +23,8 @@
     <p:sldId id="272" r:id="rId17"/>
     <p:sldId id="265" r:id="rId18"/>
     <p:sldId id="274" r:id="rId19"/>
-    <p:sldId id="267" r:id="rId20"/>
+    <p:sldId id="279" r:id="rId20"/>
+    <p:sldId id="267" r:id="rId21"/>
   </p:sldIdLst>
   <p:sldSz cx="9144000" cy="6858000" type="screen4x3"/>
   <p:notesSz cx="6858000" cy="9144000"/>
@@ -546,7 +547,7 @@
           <a:p>
             <a:fld id="{5BCAD085-E8A6-8845-BD4E-CB4CCA059FC4}" type="datetimeFigureOut">
               <a:rPr lang="en-US" smtClean="0"/>
-              <a:t>11/17/2025</a:t>
+              <a:t>11/23/2025</a:t>
             </a:fld>
             <a:endParaRPr lang="en-US"/>
           </a:p>
@@ -730,7 +731,7 @@
           <a:p>
             <a:fld id="{5BCAD085-E8A6-8845-BD4E-CB4CCA059FC4}" type="datetimeFigureOut">
               <a:rPr lang="en-US" smtClean="0"/>
-              <a:t>11/17/2025</a:t>
+              <a:t>11/23/2025</a:t>
             </a:fld>
             <a:endParaRPr lang="en-US"/>
           </a:p>
@@ -914,7 +915,7 @@
           <a:p>
             <a:fld id="{5BCAD085-E8A6-8845-BD4E-CB4CCA059FC4}" type="datetimeFigureOut">
               <a:rPr lang="en-US" smtClean="0"/>
-              <a:t>11/17/2025</a:t>
+              <a:t>11/23/2025</a:t>
             </a:fld>
             <a:endParaRPr lang="en-US"/>
           </a:p>
@@ -1084,7 +1085,7 @@
           <a:p>
             <a:fld id="{5BCAD085-E8A6-8845-BD4E-CB4CCA059FC4}" type="datetimeFigureOut">
               <a:rPr lang="en-US" smtClean="0"/>
-              <a:t>11/17/2025</a:t>
+              <a:t>11/23/2025</a:t>
             </a:fld>
             <a:endParaRPr lang="en-US"/>
           </a:p>
@@ -1409,7 +1410,7 @@
           <a:p>
             <a:fld id="{5BCAD085-E8A6-8845-BD4E-CB4CCA059FC4}" type="datetimeFigureOut">
               <a:rPr lang="en-US" smtClean="0"/>
-              <a:t>11/17/2025</a:t>
+              <a:t>11/23/2025</a:t>
             </a:fld>
             <a:endParaRPr lang="en-US"/>
           </a:p>
@@ -1807,7 +1808,7 @@
           <a:p>
             <a:fld id="{5BCAD085-E8A6-8845-BD4E-CB4CCA059FC4}" type="datetimeFigureOut">
               <a:rPr lang="en-US" smtClean="0"/>
-              <a:t>11/17/2025</a:t>
+              <a:t>11/23/2025</a:t>
             </a:fld>
             <a:endParaRPr lang="en-US"/>
           </a:p>
@@ -2241,7 +2242,7 @@
           <a:p>
             <a:fld id="{5BCAD085-E8A6-8845-BD4E-CB4CCA059FC4}" type="datetimeFigureOut">
               <a:rPr lang="en-US" smtClean="0"/>
-              <a:t>11/17/2025</a:t>
+              <a:t>11/23/2025</a:t>
             </a:fld>
             <a:endParaRPr lang="en-US"/>
           </a:p>
@@ -2369,7 +2370,7 @@
           <a:p>
             <a:fld id="{5BCAD085-E8A6-8845-BD4E-CB4CCA059FC4}" type="datetimeFigureOut">
               <a:rPr lang="en-US" smtClean="0"/>
-              <a:t>11/17/2025</a:t>
+              <a:t>11/23/2025</a:t>
             </a:fld>
             <a:endParaRPr lang="en-US"/>
           </a:p>
@@ -2474,7 +2475,7 @@
           <a:p>
             <a:fld id="{5BCAD085-E8A6-8845-BD4E-CB4CCA059FC4}" type="datetimeFigureOut">
               <a:rPr lang="en-US" smtClean="0"/>
-              <a:t>11/17/2025</a:t>
+              <a:t>11/23/2025</a:t>
             </a:fld>
             <a:endParaRPr lang="en-US"/>
           </a:p>
@@ -2915,7 +2916,7 @@
           <a:p>
             <a:fld id="{5BCAD085-E8A6-8845-BD4E-CB4CCA059FC4}" type="datetimeFigureOut">
               <a:rPr lang="en-US" smtClean="0"/>
-              <a:t>11/17/2025</a:t>
+              <a:t>11/23/2025</a:t>
             </a:fld>
             <a:endParaRPr lang="en-US"/>
           </a:p>
@@ -3342,7 +3343,7 @@
           <a:p>
             <a:fld id="{5BCAD085-E8A6-8845-BD4E-CB4CCA059FC4}" type="datetimeFigureOut">
               <a:rPr lang="en-US" smtClean="0"/>
-              <a:t>11/17/2025</a:t>
+              <a:t>11/23/2025</a:t>
             </a:fld>
             <a:endParaRPr lang="en-US"/>
           </a:p>
@@ -3627,7 +3628,7 @@
           <a:p>
             <a:fld id="{5BCAD085-E8A6-8845-BD4E-CB4CCA059FC4}" type="datetimeFigureOut">
               <a:rPr lang="en-US" smtClean="0"/>
-              <a:t>11/17/2025</a:t>
+              <a:t>11/23/2025</a:t>
             </a:fld>
             <a:endParaRPr lang="en-US"/>
           </a:p>
@@ -5672,7 +5673,13 @@
       </p:grpSpPr>
       <p:sp>
         <p:nvSpPr>
-          <p:cNvPr id="2" name="Title 1"/>
+          <p:cNvPr id="2" name="Title 1">
+            <a:extLst>
+              <a:ext uri="{FF2B5EF4-FFF2-40B4-BE49-F238E27FC236}">
+                <a16:creationId xmlns:a16="http://schemas.microsoft.com/office/drawing/2014/main" id="{9E502015-1942-50A0-E196-9A62F241E0F2}"/>
+              </a:ext>
+            </a:extLst>
+          </p:cNvPr>
           <p:cNvSpPr>
             <a:spLocks noGrp="1"/>
           </p:cNvSpPr>
@@ -5680,94 +5687,151 @@
             <p:ph type="title"/>
           </p:nvPr>
         </p:nvSpPr>
-        <p:spPr/>
-        <p:txBody>
-          <a:bodyPr/>
-          <a:lstStyle/>
-          <a:p>
-            <a:pPr>
-              <a:defRPr sz="3600" b="1">
+        <p:spPr>
+          <a:xfrm>
+            <a:off x="685800" y="484632"/>
+            <a:ext cx="7772400" cy="807720"/>
+          </a:xfrm>
+        </p:spPr>
+        <p:txBody>
+          <a:bodyPr>
+            <a:normAutofit/>
+          </a:bodyPr>
+          <a:lstStyle/>
+          <a:p>
+            <a:r>
+              <a:rPr lang="en-US" dirty="0">
                 <a:solidFill>
-                  <a:srgbClr val="003399"/>
+                  <a:srgbClr val="0000FF"/>
                 </a:solidFill>
-              </a:defRPr>
-            </a:pPr>
-            <a:r>
-              <a:t>Conclusion</a:t>
-            </a:r>
-          </a:p>
-        </p:txBody>
-      </p:sp>
-      <p:sp>
-        <p:nvSpPr>
-          <p:cNvPr id="3" name="Content Placeholder 2"/>
-          <p:cNvSpPr>
-            <a:spLocks noGrp="1"/>
-          </p:cNvSpPr>
+              </a:rPr>
+              <a:t>Running the model</a:t>
+            </a:r>
+            <a:endParaRPr lang="en-IN" dirty="0">
+              <a:solidFill>
+                <a:srgbClr val="0000FF"/>
+              </a:solidFill>
+            </a:endParaRPr>
+          </a:p>
+        </p:txBody>
+      </p:sp>
+      <p:pic>
+        <p:nvPicPr>
+          <p:cNvPr id="5" name="Content Placeholder 4" descr="A screenshot of a computer">
+            <a:extLst>
+              <a:ext uri="{FF2B5EF4-FFF2-40B4-BE49-F238E27FC236}">
+                <a16:creationId xmlns:a16="http://schemas.microsoft.com/office/drawing/2014/main" id="{0FA282E9-0026-411B-5728-57F058E07658}"/>
+              </a:ext>
+            </a:extLst>
+          </p:cNvPr>
+          <p:cNvPicPr>
+            <a:picLocks noGrp="1" noChangeAspect="1"/>
+          </p:cNvPicPr>
           <p:nvPr>
             <p:ph idx="1"/>
           </p:nvPr>
-        </p:nvSpPr>
-        <p:spPr/>
-        <p:txBody>
-          <a:bodyPr>
-            <a:normAutofit fontScale="92500" lnSpcReduction="10000"/>
+        </p:nvPicPr>
+        <p:blipFill>
+          <a:blip r:embed="rId2"/>
+          <a:stretch>
+            <a:fillRect/>
+          </a:stretch>
+        </p:blipFill>
+        <p:spPr>
+          <a:xfrm>
+            <a:off x="685800" y="1343118"/>
+            <a:ext cx="7772400" cy="3637314"/>
+          </a:xfrm>
+        </p:spPr>
+      </p:pic>
+      <p:sp>
+        <p:nvSpPr>
+          <p:cNvPr id="6" name="TextBox 5">
+            <a:extLst>
+              <a:ext uri="{FF2B5EF4-FFF2-40B4-BE49-F238E27FC236}">
+                <a16:creationId xmlns:a16="http://schemas.microsoft.com/office/drawing/2014/main" id="{9D73D383-D4E8-AC2E-A869-9D2C08C207F2}"/>
+              </a:ext>
+            </a:extLst>
+          </p:cNvPr>
+          <p:cNvSpPr txBox="1"/>
+          <p:nvPr/>
+        </p:nvSpPr>
+        <p:spPr>
+          <a:xfrm>
+            <a:off x="633984" y="5055582"/>
+            <a:ext cx="7824216" cy="923330"/>
+          </a:xfrm>
+          <a:prstGeom prst="rect">
+            <a:avLst/>
+          </a:prstGeom>
+          <a:noFill/>
+        </p:spPr>
+        <p:txBody>
+          <a:bodyPr wrap="square" rtlCol="0">
+            <a:spAutoFit/>
           </a:bodyPr>
           <a:lstStyle/>
           <a:p>
-            <a:endParaRPr dirty="0"/>
-          </a:p>
-          <a:p>
-            <a:pPr>
-              <a:spcAft>
-                <a:spcPts val="500"/>
-              </a:spcAft>
-              <a:defRPr sz="2000"/>
-            </a:pPr>
-            <a:r>
-              <a:rPr sz="3000" dirty="0"/>
-              <a:t>Combines Machine Learning and Web Development effectively</a:t>
-            </a:r>
-          </a:p>
-          <a:p>
-            <a:pPr>
-              <a:spcAft>
-                <a:spcPts val="500"/>
-              </a:spcAft>
-              <a:defRPr sz="2000"/>
-            </a:pPr>
-            <a:r>
-              <a:rPr sz="3000" dirty="0"/>
-              <a:t>Provides real-time AI-powered verification of news authenticity</a:t>
-            </a:r>
-          </a:p>
-          <a:p>
-            <a:pPr>
-              <a:spcAft>
-                <a:spcPts val="500"/>
-              </a:spcAft>
-              <a:defRPr sz="2000"/>
-            </a:pPr>
-            <a:r>
-              <a:rPr sz="3000" dirty="0"/>
-              <a:t> Demonstrates full-stack integration of Flask and React</a:t>
-            </a:r>
-          </a:p>
-          <a:p>
-            <a:pPr>
-              <a:spcAft>
-                <a:spcPts val="500"/>
-              </a:spcAft>
-              <a:defRPr sz="2000"/>
-            </a:pPr>
-            <a:r>
-              <a:rPr sz="3000" dirty="0"/>
-              <a:t>Scalable solution for combating misinformation online</a:t>
-            </a:r>
+            <a:r>
+              <a:rPr lang="en-US" dirty="0"/>
+              <a:t>Given above is a real news article taken from “The Hindu” as input into the website with the model deployed, as we can see the model was able to correctly identify the article as Real news.</a:t>
+            </a:r>
+            <a:endParaRPr lang="en-IN" dirty="0"/>
+          </a:p>
+        </p:txBody>
+      </p:sp>
+      <p:sp>
+        <p:nvSpPr>
+          <p:cNvPr id="7" name="Diamond 6">
+            <a:extLst>
+              <a:ext uri="{FF2B5EF4-FFF2-40B4-BE49-F238E27FC236}">
+                <a16:creationId xmlns:a16="http://schemas.microsoft.com/office/drawing/2014/main" id="{30D063D4-F847-45B8-94E5-FB2B655FD33F}"/>
+              </a:ext>
+            </a:extLst>
+          </p:cNvPr>
+          <p:cNvSpPr/>
+          <p:nvPr/>
+        </p:nvSpPr>
+        <p:spPr>
+          <a:xfrm>
+            <a:off x="481584" y="5181600"/>
+            <a:ext cx="152400" cy="158496"/>
+          </a:xfrm>
+          <a:prstGeom prst="diamond">
+            <a:avLst/>
+          </a:prstGeom>
+        </p:spPr>
+        <p:style>
+          <a:lnRef idx="2">
+            <a:schemeClr val="accent1">
+              <a:shade val="15000"/>
+            </a:schemeClr>
+          </a:lnRef>
+          <a:fillRef idx="1">
+            <a:schemeClr val="accent1"/>
+          </a:fillRef>
+          <a:effectRef idx="0">
+            <a:schemeClr val="accent1"/>
+          </a:effectRef>
+          <a:fontRef idx="minor">
+            <a:schemeClr val="lt1"/>
+          </a:fontRef>
+        </p:style>
+        <p:txBody>
+          <a:bodyPr rtlCol="0" anchor="ctr"/>
+          <a:lstStyle/>
+          <a:p>
+            <a:pPr algn="ctr"/>
+            <a:endParaRPr lang="en-IN"/>
           </a:p>
         </p:txBody>
       </p:sp>
     </p:spTree>
+    <p:extLst>
+      <p:ext uri="{BB962C8B-B14F-4D97-AF65-F5344CB8AC3E}">
+        <p14:creationId xmlns:p14="http://schemas.microsoft.com/office/powerpoint/2010/main" val="291095262"/>
+      </p:ext>
+    </p:extLst>
   </p:cSld>
   <p:clrMapOvr>
     <a:masterClrMapping/>
@@ -5879,6 +5943,128 @@
             </a:pPr>
             <a:r>
               <a:t>• Real-time predictions with TF-IDF vectorization</a:t>
+            </a:r>
+          </a:p>
+        </p:txBody>
+      </p:sp>
+    </p:spTree>
+  </p:cSld>
+  <p:clrMapOvr>
+    <a:masterClrMapping/>
+  </p:clrMapOvr>
+</p:sld>
+</file>
+
+<file path=ppt/slides/slide20.xml><?xml version="1.0" encoding="utf-8"?>
+<p:sld xmlns:a="http://schemas.openxmlformats.org/drawingml/2006/main" xmlns:r="http://schemas.openxmlformats.org/officeDocument/2006/relationships" xmlns:p="http://schemas.openxmlformats.org/presentationml/2006/main">
+  <p:cSld>
+    <p:spTree>
+      <p:nvGrpSpPr>
+        <p:cNvPr id="1" name=""/>
+        <p:cNvGrpSpPr/>
+        <p:nvPr/>
+      </p:nvGrpSpPr>
+      <p:grpSpPr>
+        <a:xfrm>
+          <a:off x="0" y="0"/>
+          <a:ext cx="0" cy="0"/>
+          <a:chOff x="0" y="0"/>
+          <a:chExt cx="0" cy="0"/>
+        </a:xfrm>
+      </p:grpSpPr>
+      <p:sp>
+        <p:nvSpPr>
+          <p:cNvPr id="2" name="Title 1"/>
+          <p:cNvSpPr>
+            <a:spLocks noGrp="1"/>
+          </p:cNvSpPr>
+          <p:nvPr>
+            <p:ph type="title"/>
+          </p:nvPr>
+        </p:nvSpPr>
+        <p:spPr/>
+        <p:txBody>
+          <a:bodyPr/>
+          <a:lstStyle/>
+          <a:p>
+            <a:pPr>
+              <a:defRPr sz="3600" b="1">
+                <a:solidFill>
+                  <a:srgbClr val="003399"/>
+                </a:solidFill>
+              </a:defRPr>
+            </a:pPr>
+            <a:r>
+              <a:t>Conclusion</a:t>
+            </a:r>
+          </a:p>
+        </p:txBody>
+      </p:sp>
+      <p:sp>
+        <p:nvSpPr>
+          <p:cNvPr id="3" name="Content Placeholder 2"/>
+          <p:cNvSpPr>
+            <a:spLocks noGrp="1"/>
+          </p:cNvSpPr>
+          <p:nvPr>
+            <p:ph idx="1"/>
+          </p:nvPr>
+        </p:nvSpPr>
+        <p:spPr/>
+        <p:txBody>
+          <a:bodyPr>
+            <a:normAutofit fontScale="92500" lnSpcReduction="10000"/>
+          </a:bodyPr>
+          <a:lstStyle/>
+          <a:p>
+            <a:endParaRPr dirty="0"/>
+          </a:p>
+          <a:p>
+            <a:pPr>
+              <a:spcAft>
+                <a:spcPts val="500"/>
+              </a:spcAft>
+              <a:defRPr sz="2000"/>
+            </a:pPr>
+            <a:r>
+              <a:rPr sz="3000" dirty="0"/>
+              <a:t>Combines Machine Learning and Web Development effectively</a:t>
+            </a:r>
+          </a:p>
+          <a:p>
+            <a:pPr>
+              <a:spcAft>
+                <a:spcPts val="500"/>
+              </a:spcAft>
+              <a:defRPr sz="2000"/>
+            </a:pPr>
+            <a:r>
+              <a:rPr sz="3000" dirty="0"/>
+              <a:t>Provides real-time AI-powered verification of news authenticity</a:t>
+            </a:r>
+          </a:p>
+          <a:p>
+            <a:pPr>
+              <a:spcAft>
+                <a:spcPts val="500"/>
+              </a:spcAft>
+              <a:defRPr sz="2000"/>
+            </a:pPr>
+            <a:r>
+              <a:rPr sz="3000" dirty="0"/>
+              <a:t> Demonstrates full-stack integration of Flask and React</a:t>
+            </a:r>
+          </a:p>
+          <a:p>
+            <a:pPr>
+              <a:spcAft>
+                <a:spcPts val="500"/>
+              </a:spcAft>
+              <a:defRPr sz="2000"/>
+            </a:pPr>
+            <a:r>
+              <a:rPr sz="3000" dirty="0"/>
+              <a:t>Scalable solution for combating misinformation online</a:t>
             </a:r>
           </a:p>
         </p:txBody>
